--- a/exports/pptx/lessons/middle-module-08-yoga/day-07-physiology.pptx
+++ b/exports/pptx/lessons/middle-module-08-yoga/day-07-physiology.pptx
@@ -18,9 +18,14 @@
     <p:sldId id="266" r:id="rId12"/>
     <p:sldId id="267" r:id="rId13"/>
     <p:sldId id="268" r:id="rId14"/>
+    <p:sldId id="269" r:id="rId15"/>
+    <p:sldId id="270" r:id="rId16"/>
+    <p:sldId id="271" r:id="rId17"/>
+    <p:sldId id="272" r:id="rId18"/>
+    <p:sldId id="273" r:id="rId19"/>
   </p:sldIdLst>
   <p:notesMasterIdLst>
-    <p:notesMasterId r:id="rId15"/>
+    <p:notesMasterId r:id="rId20"/>
   </p:notesMasterIdLst>
   <p:sldSz cx="9144000" cy="5143500"/>
   <p:notesSz cx="5143500" cy="9144000"/>
@@ -890,6 +895,446 @@
             <a:fld id="{F7021451-1387-4CA6-816F-3879F97B5CBC}" type="slidenum">
               <a:rPr lang="en-US"/>
               <a:t>13</a:t>
+            </a:fld>
+            <a:endParaRPr lang="en-US"/>
+          </a:p>
+        </p:txBody>
+      </p:sp>
+    </p:spTree>
+    <p:extLst>
+      <p:ext uri="{BB962C8B-B14F-4D97-AF65-F5344CB8AC3E}">
+        <p14:creationId xmlns:p14="http://schemas.microsoft.com/office/powerpoint/2010/main" val="1024086991"/>
+      </p:ext>
+    </p:extLst>
+  </p:cSld>
+  <p:clrMapOvr>
+    <a:masterClrMapping/>
+  </p:clrMapOvr>
+</p:notes>
+</file>
+
+<file path=ppt/notesSlides/notesSlide14.xml><?xml version="1.0" encoding="utf-8"?>
+<p:notes xmlns:a="http://schemas.openxmlformats.org/drawingml/2006/main" xmlns:r="http://schemas.openxmlformats.org/officeDocument/2006/relationships" xmlns:p="http://schemas.openxmlformats.org/presentationml/2006/main">
+  <p:cSld>
+    <p:spTree>
+      <p:nvGrpSpPr>
+        <p:cNvPr id="1" name=""/>
+        <p:cNvGrpSpPr/>
+        <p:nvPr/>
+      </p:nvGrpSpPr>
+      <p:grpSpPr>
+        <a:xfrm>
+          <a:off x="0" y="0"/>
+          <a:ext cx="0" cy="0"/>
+          <a:chOff x="0" y="0"/>
+          <a:chExt cx="0" cy="0"/>
+        </a:xfrm>
+      </p:grpSpPr>
+      <p:sp>
+        <p:nvSpPr>
+          <p:cNvPr id="2" name="Slide Image Placeholder 1"/>
+          <p:cNvSpPr>
+            <a:spLocks noGrp="1" noRot="1" noChangeAspect="1"/>
+          </p:cNvSpPr>
+          <p:nvPr>
+            <p:ph type="sldImg"/>
+          </p:nvPr>
+        </p:nvSpPr>
+        <p:spPr/>
+      </p:sp>
+      <p:sp>
+        <p:nvSpPr>
+          <p:cNvPr id="3" name="Notes Placeholder 2"/>
+          <p:cNvSpPr>
+            <a:spLocks noGrp="1"/>
+          </p:cNvSpPr>
+          <p:nvPr>
+            <p:ph type="body" idx="1"/>
+          </p:nvPr>
+        </p:nvSpPr>
+        <p:spPr/>
+        <p:txBody>
+          <a:bodyPr/>
+          <a:lstStyle/>
+          <a:p>
+            <a:r>
+              <a:rPr lang="en-US" dirty="0"/>
+              <a:t/>
+            </a:r>
+            <a:endParaRPr lang="en-US" dirty="0"/>
+          </a:p>
+        </p:txBody>
+      </p:sp>
+      <p:sp>
+        <p:nvSpPr>
+          <p:cNvPr id="4" name="Slide Number Placeholder 3"/>
+          <p:cNvSpPr>
+            <a:spLocks noGrp="1"/>
+          </p:cNvSpPr>
+          <p:nvPr>
+            <p:ph type="sldNum" sz="quarter" idx="10"/>
+          </p:nvPr>
+        </p:nvSpPr>
+        <p:spPr/>
+        <p:txBody>
+          <a:bodyPr/>
+          <a:lstStyle/>
+          <a:p>
+            <a:fld id="{F7021451-1387-4CA6-816F-3879F97B5CBC}" type="slidenum">
+              <a:rPr lang="en-US"/>
+              <a:t>14</a:t>
+            </a:fld>
+            <a:endParaRPr lang="en-US"/>
+          </a:p>
+        </p:txBody>
+      </p:sp>
+    </p:spTree>
+    <p:extLst>
+      <p:ext uri="{BB962C8B-B14F-4D97-AF65-F5344CB8AC3E}">
+        <p14:creationId xmlns:p14="http://schemas.microsoft.com/office/powerpoint/2010/main" val="1024086991"/>
+      </p:ext>
+    </p:extLst>
+  </p:cSld>
+  <p:clrMapOvr>
+    <a:masterClrMapping/>
+  </p:clrMapOvr>
+</p:notes>
+</file>
+
+<file path=ppt/notesSlides/notesSlide15.xml><?xml version="1.0" encoding="utf-8"?>
+<p:notes xmlns:a="http://schemas.openxmlformats.org/drawingml/2006/main" xmlns:r="http://schemas.openxmlformats.org/officeDocument/2006/relationships" xmlns:p="http://schemas.openxmlformats.org/presentationml/2006/main">
+  <p:cSld>
+    <p:spTree>
+      <p:nvGrpSpPr>
+        <p:cNvPr id="1" name=""/>
+        <p:cNvGrpSpPr/>
+        <p:nvPr/>
+      </p:nvGrpSpPr>
+      <p:grpSpPr>
+        <a:xfrm>
+          <a:off x="0" y="0"/>
+          <a:ext cx="0" cy="0"/>
+          <a:chOff x="0" y="0"/>
+          <a:chExt cx="0" cy="0"/>
+        </a:xfrm>
+      </p:grpSpPr>
+      <p:sp>
+        <p:nvSpPr>
+          <p:cNvPr id="2" name="Slide Image Placeholder 1"/>
+          <p:cNvSpPr>
+            <a:spLocks noGrp="1" noRot="1" noChangeAspect="1"/>
+          </p:cNvSpPr>
+          <p:nvPr>
+            <p:ph type="sldImg"/>
+          </p:nvPr>
+        </p:nvSpPr>
+        <p:spPr/>
+      </p:sp>
+      <p:sp>
+        <p:nvSpPr>
+          <p:cNvPr id="3" name="Notes Placeholder 2"/>
+          <p:cNvSpPr>
+            <a:spLocks noGrp="1"/>
+          </p:cNvSpPr>
+          <p:nvPr>
+            <p:ph type="body" idx="1"/>
+          </p:nvPr>
+        </p:nvSpPr>
+        <p:spPr/>
+        <p:txBody>
+          <a:bodyPr/>
+          <a:lstStyle/>
+          <a:p>
+            <a:r>
+              <a:rPr lang="en-US" dirty="0"/>
+              <a:t/>
+            </a:r>
+            <a:endParaRPr lang="en-US" dirty="0"/>
+          </a:p>
+        </p:txBody>
+      </p:sp>
+      <p:sp>
+        <p:nvSpPr>
+          <p:cNvPr id="4" name="Slide Number Placeholder 3"/>
+          <p:cNvSpPr>
+            <a:spLocks noGrp="1"/>
+          </p:cNvSpPr>
+          <p:nvPr>
+            <p:ph type="sldNum" sz="quarter" idx="10"/>
+          </p:nvPr>
+        </p:nvSpPr>
+        <p:spPr/>
+        <p:txBody>
+          <a:bodyPr/>
+          <a:lstStyle/>
+          <a:p>
+            <a:fld id="{F7021451-1387-4CA6-816F-3879F97B5CBC}" type="slidenum">
+              <a:rPr lang="en-US"/>
+              <a:t>15</a:t>
+            </a:fld>
+            <a:endParaRPr lang="en-US"/>
+          </a:p>
+        </p:txBody>
+      </p:sp>
+    </p:spTree>
+    <p:extLst>
+      <p:ext uri="{BB962C8B-B14F-4D97-AF65-F5344CB8AC3E}">
+        <p14:creationId xmlns:p14="http://schemas.microsoft.com/office/powerpoint/2010/main" val="1024086991"/>
+      </p:ext>
+    </p:extLst>
+  </p:cSld>
+  <p:clrMapOvr>
+    <a:masterClrMapping/>
+  </p:clrMapOvr>
+</p:notes>
+</file>
+
+<file path=ppt/notesSlides/notesSlide16.xml><?xml version="1.0" encoding="utf-8"?>
+<p:notes xmlns:a="http://schemas.openxmlformats.org/drawingml/2006/main" xmlns:r="http://schemas.openxmlformats.org/officeDocument/2006/relationships" xmlns:p="http://schemas.openxmlformats.org/presentationml/2006/main">
+  <p:cSld>
+    <p:spTree>
+      <p:nvGrpSpPr>
+        <p:cNvPr id="1" name=""/>
+        <p:cNvGrpSpPr/>
+        <p:nvPr/>
+      </p:nvGrpSpPr>
+      <p:grpSpPr>
+        <a:xfrm>
+          <a:off x="0" y="0"/>
+          <a:ext cx="0" cy="0"/>
+          <a:chOff x="0" y="0"/>
+          <a:chExt cx="0" cy="0"/>
+        </a:xfrm>
+      </p:grpSpPr>
+      <p:sp>
+        <p:nvSpPr>
+          <p:cNvPr id="2" name="Slide Image Placeholder 1"/>
+          <p:cNvSpPr>
+            <a:spLocks noGrp="1" noRot="1" noChangeAspect="1"/>
+          </p:cNvSpPr>
+          <p:nvPr>
+            <p:ph type="sldImg"/>
+          </p:nvPr>
+        </p:nvSpPr>
+        <p:spPr/>
+      </p:sp>
+      <p:sp>
+        <p:nvSpPr>
+          <p:cNvPr id="3" name="Notes Placeholder 2"/>
+          <p:cNvSpPr>
+            <a:spLocks noGrp="1"/>
+          </p:cNvSpPr>
+          <p:nvPr>
+            <p:ph type="body" idx="1"/>
+          </p:nvPr>
+        </p:nvSpPr>
+        <p:spPr/>
+        <p:txBody>
+          <a:bodyPr/>
+          <a:lstStyle/>
+          <a:p>
+            <a:r>
+              <a:rPr lang="en-US" dirty="0"/>
+              <a:t/>
+            </a:r>
+            <a:endParaRPr lang="en-US" dirty="0"/>
+          </a:p>
+        </p:txBody>
+      </p:sp>
+      <p:sp>
+        <p:nvSpPr>
+          <p:cNvPr id="4" name="Slide Number Placeholder 3"/>
+          <p:cNvSpPr>
+            <a:spLocks noGrp="1"/>
+          </p:cNvSpPr>
+          <p:nvPr>
+            <p:ph type="sldNum" sz="quarter" idx="10"/>
+          </p:nvPr>
+        </p:nvSpPr>
+        <p:spPr/>
+        <p:txBody>
+          <a:bodyPr/>
+          <a:lstStyle/>
+          <a:p>
+            <a:fld id="{F7021451-1387-4CA6-816F-3879F97B5CBC}" type="slidenum">
+              <a:rPr lang="en-US"/>
+              <a:t>16</a:t>
+            </a:fld>
+            <a:endParaRPr lang="en-US"/>
+          </a:p>
+        </p:txBody>
+      </p:sp>
+    </p:spTree>
+    <p:extLst>
+      <p:ext uri="{BB962C8B-B14F-4D97-AF65-F5344CB8AC3E}">
+        <p14:creationId xmlns:p14="http://schemas.microsoft.com/office/powerpoint/2010/main" val="1024086991"/>
+      </p:ext>
+    </p:extLst>
+  </p:cSld>
+  <p:clrMapOvr>
+    <a:masterClrMapping/>
+  </p:clrMapOvr>
+</p:notes>
+</file>
+
+<file path=ppt/notesSlides/notesSlide17.xml><?xml version="1.0" encoding="utf-8"?>
+<p:notes xmlns:a="http://schemas.openxmlformats.org/drawingml/2006/main" xmlns:r="http://schemas.openxmlformats.org/officeDocument/2006/relationships" xmlns:p="http://schemas.openxmlformats.org/presentationml/2006/main">
+  <p:cSld>
+    <p:spTree>
+      <p:nvGrpSpPr>
+        <p:cNvPr id="1" name=""/>
+        <p:cNvGrpSpPr/>
+        <p:nvPr/>
+      </p:nvGrpSpPr>
+      <p:grpSpPr>
+        <a:xfrm>
+          <a:off x="0" y="0"/>
+          <a:ext cx="0" cy="0"/>
+          <a:chOff x="0" y="0"/>
+          <a:chExt cx="0" cy="0"/>
+        </a:xfrm>
+      </p:grpSpPr>
+      <p:sp>
+        <p:nvSpPr>
+          <p:cNvPr id="2" name="Slide Image Placeholder 1"/>
+          <p:cNvSpPr>
+            <a:spLocks noGrp="1" noRot="1" noChangeAspect="1"/>
+          </p:cNvSpPr>
+          <p:nvPr>
+            <p:ph type="sldImg"/>
+          </p:nvPr>
+        </p:nvSpPr>
+        <p:spPr/>
+      </p:sp>
+      <p:sp>
+        <p:nvSpPr>
+          <p:cNvPr id="3" name="Notes Placeholder 2"/>
+          <p:cNvSpPr>
+            <a:spLocks noGrp="1"/>
+          </p:cNvSpPr>
+          <p:nvPr>
+            <p:ph type="body" idx="1"/>
+          </p:nvPr>
+        </p:nvSpPr>
+        <p:spPr/>
+        <p:txBody>
+          <a:bodyPr/>
+          <a:lstStyle/>
+          <a:p>
+            <a:r>
+              <a:rPr lang="en-US" dirty="0"/>
+              <a:t/>
+            </a:r>
+            <a:endParaRPr lang="en-US" dirty="0"/>
+          </a:p>
+        </p:txBody>
+      </p:sp>
+      <p:sp>
+        <p:nvSpPr>
+          <p:cNvPr id="4" name="Slide Number Placeholder 3"/>
+          <p:cNvSpPr>
+            <a:spLocks noGrp="1"/>
+          </p:cNvSpPr>
+          <p:nvPr>
+            <p:ph type="sldNum" sz="quarter" idx="10"/>
+          </p:nvPr>
+        </p:nvSpPr>
+        <p:spPr/>
+        <p:txBody>
+          <a:bodyPr/>
+          <a:lstStyle/>
+          <a:p>
+            <a:fld id="{F7021451-1387-4CA6-816F-3879F97B5CBC}" type="slidenum">
+              <a:rPr lang="en-US"/>
+              <a:t>17</a:t>
+            </a:fld>
+            <a:endParaRPr lang="en-US"/>
+          </a:p>
+        </p:txBody>
+      </p:sp>
+    </p:spTree>
+    <p:extLst>
+      <p:ext uri="{BB962C8B-B14F-4D97-AF65-F5344CB8AC3E}">
+        <p14:creationId xmlns:p14="http://schemas.microsoft.com/office/powerpoint/2010/main" val="1024086991"/>
+      </p:ext>
+    </p:extLst>
+  </p:cSld>
+  <p:clrMapOvr>
+    <a:masterClrMapping/>
+  </p:clrMapOvr>
+</p:notes>
+</file>
+
+<file path=ppt/notesSlides/notesSlide18.xml><?xml version="1.0" encoding="utf-8"?>
+<p:notes xmlns:a="http://schemas.openxmlformats.org/drawingml/2006/main" xmlns:r="http://schemas.openxmlformats.org/officeDocument/2006/relationships" xmlns:p="http://schemas.openxmlformats.org/presentationml/2006/main">
+  <p:cSld>
+    <p:spTree>
+      <p:nvGrpSpPr>
+        <p:cNvPr id="1" name=""/>
+        <p:cNvGrpSpPr/>
+        <p:nvPr/>
+      </p:nvGrpSpPr>
+      <p:grpSpPr>
+        <a:xfrm>
+          <a:off x="0" y="0"/>
+          <a:ext cx="0" cy="0"/>
+          <a:chOff x="0" y="0"/>
+          <a:chExt cx="0" cy="0"/>
+        </a:xfrm>
+      </p:grpSpPr>
+      <p:sp>
+        <p:nvSpPr>
+          <p:cNvPr id="2" name="Slide Image Placeholder 1"/>
+          <p:cNvSpPr>
+            <a:spLocks noGrp="1" noRot="1" noChangeAspect="1"/>
+          </p:cNvSpPr>
+          <p:nvPr>
+            <p:ph type="sldImg"/>
+          </p:nvPr>
+        </p:nvSpPr>
+        <p:spPr/>
+      </p:sp>
+      <p:sp>
+        <p:nvSpPr>
+          <p:cNvPr id="3" name="Notes Placeholder 2"/>
+          <p:cNvSpPr>
+            <a:spLocks noGrp="1"/>
+          </p:cNvSpPr>
+          <p:nvPr>
+            <p:ph type="body" idx="1"/>
+          </p:nvPr>
+        </p:nvSpPr>
+        <p:spPr/>
+        <p:txBody>
+          <a:bodyPr/>
+          <a:lstStyle/>
+          <a:p>
+            <a:r>
+              <a:rPr lang="en-US" dirty="0"/>
+              <a:t/>
+            </a:r>
+            <a:endParaRPr lang="en-US" dirty="0"/>
+          </a:p>
+        </p:txBody>
+      </p:sp>
+      <p:sp>
+        <p:nvSpPr>
+          <p:cNvPr id="4" name="Slide Number Placeholder 3"/>
+          <p:cNvSpPr>
+            <a:spLocks noGrp="1"/>
+          </p:cNvSpPr>
+          <p:nvPr>
+            <p:ph type="sldNum" sz="quarter" idx="10"/>
+          </p:nvPr>
+        </p:nvSpPr>
+        <p:spPr/>
+        <p:txBody>
+          <a:bodyPr/>
+          <a:lstStyle/>
+          <a:p>
+            <a:fld id="{F7021451-1387-4CA6-816F-3879F97B5CBC}" type="slidenum">
+              <a:rPr lang="en-US"/>
+              <a:t>18</a:t>
             </a:fld>
             <a:endParaRPr lang="en-US"/>
           </a:p>
@@ -2189,102 +2634,6 @@
         </p:nvSpPr>
         <p:spPr>
           <a:xfrm>
-            <a:off x="406301" y="1223963"/>
-            <a:ext cx="8498026" cy="274290"/>
-          </a:xfrm>
-          <a:prstGeom prst="rect">
-            <a:avLst/>
-          </a:prstGeom>
-          <a:noFill/>
-          <a:ln/>
-        </p:spPr>
-        <p:txBody>
-          <a:bodyPr wrap="square" lIns="0" tIns="0" rIns="0" bIns="0" rtlCol="0" anchor="t"/>
-          <a:lstStyle/>
-          <a:p>
-            <a:pPr algn="l" indent="0" marL="0">
-              <a:lnSpc>
-                <a:spcPts val="2160"/>
-              </a:lnSpc>
-              <a:spcBef>
-                <a:spcPts val="600"/>
-              </a:spcBef>
-              <a:spcAft>
-                <a:spcPts val="800"/>
-              </a:spcAft>
-              <a:buNone/>
-            </a:pPr>
-            <a:r>
-              <a:rPr lang="en-US" sz="1800" b="1" dirty="0">
-                <a:solidFill>
-                  <a:srgbClr val="FE4447"/>
-                </a:solidFill>
-                <a:latin typeface="Georgia" pitchFamily="34" charset="0"/>
-                <a:ea typeface="Georgia" pitchFamily="34" charset="-122"/>
-                <a:cs typeface="Georgia" pitchFamily="34" charset="-120"/>
-              </a:rPr>
-              <a:t>Learning objective</a:t>
-            </a:r>
-            <a:endParaRPr lang="en-US" sz="1800" dirty="0"/>
-          </a:p>
-        </p:txBody>
-      </p:sp>
-      <p:sp>
-        <p:nvSpPr>
-          <p:cNvPr id="6" name="Text 4"/>
-          <p:cNvSpPr/>
-          <p:nvPr/>
-        </p:nvSpPr>
-        <p:spPr>
-          <a:xfrm>
-            <a:off x="406301" y="1637854"/>
-            <a:ext cx="8498026" cy="639812"/>
-          </a:xfrm>
-          <a:prstGeom prst="rect">
-            <a:avLst/>
-          </a:prstGeom>
-          <a:noFill/>
-          <a:ln/>
-        </p:spPr>
-        <p:txBody>
-          <a:bodyPr wrap="square" lIns="0" tIns="0" rIns="0" bIns="0" rtlCol="0" anchor="t"/>
-          <a:lstStyle/>
-          <a:p>
-            <a:pPr algn="l" indent="0" marL="0">
-              <a:lnSpc>
-                <a:spcPts val="1680"/>
-              </a:lnSpc>
-              <a:spcBef>
-                <a:spcPts val="300"/>
-              </a:spcBef>
-              <a:spcAft>
-                <a:spcPts val="300"/>
-              </a:spcAft>
-              <a:buNone/>
-            </a:pPr>
-            <a:r>
-              <a:rPr lang="en-US" sz="1200" dirty="0">
-                <a:solidFill>
-                  <a:srgbClr val="1C2833"/>
-                </a:solidFill>
-                <a:latin typeface="Arial" pitchFamily="34" charset="0"/>
-                <a:ea typeface="Arial" pitchFamily="34" charset="-122"/>
-                <a:cs typeface="Arial" pitchFamily="34" charset="-120"/>
-              </a:rPr>
-              <a:t>By the end of this lesson, students will explain at Middle-band level why slow breathing and forward folds shift the body toward "rest-and-digest" (parasympathetic) function, and why backbends and inversions can shift it toward "fight-or-flight" (sympathetic) activation.</a:t>
-            </a:r>
-            <a:endParaRPr lang="en-US" sz="1200" dirty="0"/>
-          </a:p>
-        </p:txBody>
-      </p:sp>
-      <p:sp>
-        <p:nvSpPr>
-          <p:cNvPr id="7" name="Text 5"/>
-          <p:cNvSpPr/>
-          <p:nvPr/>
-        </p:nvSpPr>
-        <p:spPr>
-          <a:xfrm>
             <a:off x="406301" y="4434929"/>
             <a:ext cx="8498026" cy="213271"/>
           </a:xfrm>
@@ -2429,7 +2778,7 @@
                 <a:ea typeface="Georgia" pitchFamily="34" charset="-122"/>
                 <a:cs typeface="Georgia" pitchFamily="34" charset="-120"/>
               </a:rPr>
-              <a:t>Homework</a:t>
+              <a:t>Core (15 min) — Two modes of the body (cont.)</a:t>
             </a:r>
             <a:endParaRPr lang="en-US" sz="1800" dirty="0"/>
           </a:p>
@@ -2443,8 +2792,8 @@
         </p:nvSpPr>
         <p:spPr>
           <a:xfrm>
-            <a:off x="406301" y="870942"/>
-            <a:ext cx="8498026" cy="426541"/>
+            <a:off x="634901" y="883593"/>
+            <a:ext cx="8102798" cy="281880"/>
           </a:xfrm>
           <a:prstGeom prst="rect">
             <a:avLst/>
@@ -2456,13 +2805,77 @@
           <a:bodyPr wrap="square" lIns="0" tIns="0" rIns="0" bIns="0" rtlCol="0" anchor="t"/>
           <a:lstStyle/>
           <a:p>
+            <a:pPr algn="l" marL="342900" indent="-342900">
+              <a:lnSpc>
+                <a:spcPts val="1620"/>
+              </a:lnSpc>
+              <a:spcAft>
+                <a:spcPts val="300"/>
+              </a:spcAft>
+              <a:buSzPct val="100000"/>
+              <a:buChar char="•"/>
+            </a:pPr>
+            <a:r>
+              <a:rPr lang="en-US" sz="1200" b="1" dirty="0">
+                <a:solidFill>
+                  <a:srgbClr val="1C2833"/>
+                </a:solidFill>
+                <a:latin typeface="Arial" pitchFamily="34" charset="0"/>
+                <a:ea typeface="Arial" pitchFamily="34" charset="-122"/>
+                <a:cs typeface="Arial" pitchFamily="34" charset="-120"/>
+              </a:rPr>
+              <a:t>What this means for yoga:</a:t>
+            </a:r>
+            <a:endParaRPr lang="en-US" sz="1200" dirty="0"/>
+          </a:p>
+        </p:txBody>
+      </p:sp>
+      <p:sp>
+        <p:nvSpPr>
+          <p:cNvPr id="5" name="Text 3"/>
+          <p:cNvSpPr/>
+          <p:nvPr/>
+        </p:nvSpPr>
+        <p:spPr>
+          <a:xfrm>
+            <a:off x="634901" y="1266974"/>
+            <a:ext cx="8102798" cy="1013222"/>
+          </a:xfrm>
+          <a:prstGeom prst="rect">
+            <a:avLst/>
+          </a:prstGeom>
+          <a:noFill/>
+          <a:ln/>
+        </p:spPr>
+        <p:txBody>
+          <a:bodyPr wrap="square" lIns="0" tIns="0" rIns="0" bIns="0" rtlCol="0" anchor="t"/>
+          <a:lstStyle/>
+          <a:p>
+            <a:pPr algn="l" marL="342900" indent="-342900">
+              <a:lnSpc>
+                <a:spcPts val="1620"/>
+              </a:lnSpc>
+              <a:spcAft>
+                <a:spcPts val="300"/>
+              </a:spcAft>
+              <a:buSzPct val="100000"/>
+              <a:buChar char="•"/>
+            </a:pPr>
+            <a:r>
+              <a:rPr lang="en-US" sz="1200" b="1" dirty="0">
+                <a:solidFill>
+                  <a:srgbClr val="1C2833"/>
+                </a:solidFill>
+                <a:latin typeface="Arial" pitchFamily="34" charset="0"/>
+                <a:ea typeface="Arial" pitchFamily="34" charset="-122"/>
+                <a:cs typeface="Arial" pitchFamily="34" charset="-120"/>
+              </a:rPr>
+              <a:t>Counted-breath prāṇāyāma</a:t>
+            </a:r>
             <a:pPr algn="l" indent="0" marL="0">
               <a:lnSpc>
-                <a:spcPts val="1680"/>
-              </a:lnSpc>
-              <a:spcBef>
-                <a:spcPts val="300"/>
-              </a:spcBef>
+                <a:spcPts val="1620"/>
+              </a:lnSpc>
               <a:spcAft>
                 <a:spcPts val="300"/>
               </a:spcAft>
@@ -2477,15 +2890,147 @@
                 <a:ea typeface="Arial" pitchFamily="34" charset="-122"/>
                 <a:cs typeface="Arial" pitchFamily="34" charset="-120"/>
               </a:rPr>
-              <a:t>– Practise the stress-recovery sequence at least once before tomorrow's class. Note when (morning / before bed / before a difficult task). – Bring all project planning materials tomorrow.</a:t>
+              <a:t> (Day 6) — directly down-regulates stress response.</a:t>
             </a:r>
             <a:endParaRPr lang="en-US" sz="1200" dirty="0"/>
           </a:p>
-        </p:txBody>
-      </p:sp>
-      <p:sp>
-        <p:nvSpPr>
-          <p:cNvPr id="5" name="Text 3"/>
+          <a:p>
+            <a:pPr algn="l" marL="342900" indent="-342900">
+              <a:lnSpc>
+                <a:spcPts val="1620"/>
+              </a:lnSpc>
+              <a:spcAft>
+                <a:spcPts val="300"/>
+              </a:spcAft>
+              <a:buSzPct val="100000"/>
+              <a:buChar char="•"/>
+            </a:pPr>
+            <a:r>
+              <a:rPr lang="en-US" sz="1200" b="1" dirty="0">
+                <a:solidFill>
+                  <a:srgbClr val="1C2833"/>
+                </a:solidFill>
+                <a:latin typeface="Arial" pitchFamily="34" charset="0"/>
+                <a:ea typeface="Arial" pitchFamily="34" charset="-122"/>
+                <a:cs typeface="Arial" pitchFamily="34" charset="-120"/>
+              </a:rPr>
+              <a:t>Forward folds and child's pose</a:t>
+            </a:r>
+            <a:pPr algn="l" indent="0" marL="0">
+              <a:lnSpc>
+                <a:spcPts val="1620"/>
+              </a:lnSpc>
+              <a:spcAft>
+                <a:spcPts val="300"/>
+              </a:spcAft>
+              <a:buNone/>
+            </a:pPr>
+            <a:r>
+              <a:rPr lang="en-US" sz="1200" dirty="0">
+                <a:solidFill>
+                  <a:srgbClr val="1C2833"/>
+                </a:solidFill>
+                <a:latin typeface="Arial" pitchFamily="34" charset="0"/>
+                <a:ea typeface="Arial" pitchFamily="34" charset="-122"/>
+                <a:cs typeface="Arial" pitchFamily="34" charset="-120"/>
+              </a:rPr>
+              <a:t> — head below heart, parasympathetic-friendly. Calming.</a:t>
+            </a:r>
+            <a:endParaRPr lang="en-US" sz="1200" dirty="0"/>
+          </a:p>
+          <a:p>
+            <a:pPr algn="l" marL="342900" indent="-342900">
+              <a:lnSpc>
+                <a:spcPts val="1620"/>
+              </a:lnSpc>
+              <a:spcAft>
+                <a:spcPts val="300"/>
+              </a:spcAft>
+              <a:buSzPct val="100000"/>
+              <a:buChar char="•"/>
+            </a:pPr>
+            <a:r>
+              <a:rPr lang="en-US" sz="1200" b="1" dirty="0">
+                <a:solidFill>
+                  <a:srgbClr val="1C2833"/>
+                </a:solidFill>
+                <a:latin typeface="Arial" pitchFamily="34" charset="0"/>
+                <a:ea typeface="Arial" pitchFamily="34" charset="-122"/>
+                <a:cs typeface="Arial" pitchFamily="34" charset="-120"/>
+              </a:rPr>
+              <a:t>Backbends and inversions</a:t>
+            </a:r>
+            <a:pPr algn="l" indent="0" marL="0">
+              <a:lnSpc>
+                <a:spcPts val="1620"/>
+              </a:lnSpc>
+              <a:spcAft>
+                <a:spcPts val="300"/>
+              </a:spcAft>
+              <a:buNone/>
+            </a:pPr>
+            <a:r>
+              <a:rPr lang="en-US" sz="1200" dirty="0">
+                <a:solidFill>
+                  <a:srgbClr val="1C2833"/>
+                </a:solidFill>
+                <a:latin typeface="Arial" pitchFamily="34" charset="0"/>
+                <a:ea typeface="Arial" pitchFamily="34" charset="-122"/>
+                <a:cs typeface="Arial" pitchFamily="34" charset="-120"/>
+              </a:rPr>
+              <a:t> — energising, more sympathetic activation. (We don't teach inversions at this band.)</a:t>
+            </a:r>
+            <a:endParaRPr lang="en-US" sz="1200" dirty="0"/>
+          </a:p>
+          <a:p>
+            <a:pPr algn="l" marL="342900" indent="-342900">
+              <a:lnSpc>
+                <a:spcPts val="1620"/>
+              </a:lnSpc>
+              <a:spcAft>
+                <a:spcPts val="300"/>
+              </a:spcAft>
+              <a:buSzPct val="100000"/>
+              <a:buChar char="•"/>
+            </a:pPr>
+            <a:r>
+              <a:rPr lang="en-US" sz="1200" b="1" dirty="0">
+                <a:solidFill>
+                  <a:srgbClr val="1C2833"/>
+                </a:solidFill>
+                <a:latin typeface="Arial" pitchFamily="34" charset="0"/>
+                <a:ea typeface="Arial" pitchFamily="34" charset="-122"/>
+                <a:cs typeface="Arial" pitchFamily="34" charset="-120"/>
+              </a:rPr>
+              <a:t>Sūrya Namaskāra</a:t>
+            </a:r>
+            <a:pPr algn="l" indent="0" marL="0">
+              <a:lnSpc>
+                <a:spcPts val="1620"/>
+              </a:lnSpc>
+              <a:spcAft>
+                <a:spcPts val="300"/>
+              </a:spcAft>
+              <a:buNone/>
+            </a:pPr>
+            <a:r>
+              <a:rPr lang="en-US" sz="1200" dirty="0">
+                <a:solidFill>
+                  <a:srgbClr val="1C2833"/>
+                </a:solidFill>
+                <a:latin typeface="Arial" pitchFamily="34" charset="0"/>
+                <a:ea typeface="Arial" pitchFamily="34" charset="-122"/>
+                <a:cs typeface="Arial" pitchFamily="34" charset="-120"/>
+              </a:rPr>
+              <a:t> — mixed: opening (energising) + folding (calming). A balanced sequence.</a:t>
+            </a:r>
+            <a:endParaRPr lang="en-US" sz="1200" dirty="0"/>
+          </a:p>
+        </p:txBody>
+      </p:sp>
+      <p:sp>
+        <p:nvSpPr>
+          <p:cNvPr id="6" name="Text 4"/>
           <p:cNvSpPr/>
           <p:nvPr/>
         </p:nvSpPr>
@@ -2635,7 +3180,7 @@
                 <a:ea typeface="Georgia" pitchFamily="34" charset="-122"/>
                 <a:cs typeface="Georgia" pitchFamily="34" charset="-120"/>
               </a:rPr>
-              <a:t>Differentiation</a:t>
+              <a:t>Practice (10 min) — Stress-recovery sequence</a:t>
             </a:r>
             <a:endParaRPr lang="en-US" sz="1800" dirty="0"/>
           </a:p>
@@ -2649,8 +3194,8 @@
         </p:nvSpPr>
         <p:spPr>
           <a:xfrm>
-            <a:off x="634901" y="883593"/>
-            <a:ext cx="8102798" cy="731341"/>
+            <a:off x="406301" y="870942"/>
+            <a:ext cx="8498026" cy="213271"/>
           </a:xfrm>
           <a:prstGeom prst="rect">
             <a:avLst/>
@@ -2662,6 +3207,54 @@
           <a:bodyPr wrap="square" lIns="0" tIns="0" rIns="0" bIns="0" rtlCol="0" anchor="t"/>
           <a:lstStyle/>
           <a:p>
+            <a:pPr algn="l" indent="0" marL="0">
+              <a:lnSpc>
+                <a:spcPts val="1680"/>
+              </a:lnSpc>
+              <a:spcBef>
+                <a:spcPts val="300"/>
+              </a:spcBef>
+              <a:spcAft>
+                <a:spcPts val="300"/>
+              </a:spcAft>
+              <a:buNone/>
+            </a:pPr>
+            <a:r>
+              <a:rPr lang="en-US" sz="1200" dirty="0">
+                <a:solidFill>
+                  <a:srgbClr val="1C2833"/>
+                </a:solidFill>
+                <a:latin typeface="Arial" pitchFamily="34" charset="0"/>
+                <a:ea typeface="Arial" pitchFamily="34" charset="-122"/>
+                <a:cs typeface="Arial" pitchFamily="34" charset="-120"/>
+              </a:rPr>
+              <a:t>Demonstrate a short calming sequence the class can do before a stressful event:</a:t>
+            </a:r>
+            <a:endParaRPr lang="en-US" sz="1200" dirty="0"/>
+          </a:p>
+        </p:txBody>
+      </p:sp>
+      <p:sp>
+        <p:nvSpPr>
+          <p:cNvPr id="5" name="Text 3"/>
+          <p:cNvSpPr/>
+          <p:nvPr/>
+        </p:nvSpPr>
+        <p:spPr>
+          <a:xfrm>
+            <a:off x="634901" y="1173063"/>
+            <a:ext cx="8102798" cy="1257002"/>
+          </a:xfrm>
+          <a:prstGeom prst="rect">
+            <a:avLst/>
+          </a:prstGeom>
+          <a:noFill/>
+          <a:ln/>
+        </p:spPr>
+        <p:txBody>
+          <a:bodyPr wrap="square" lIns="0" tIns="0" rIns="0" bIns="0" rtlCol="0" anchor="t"/>
+          <a:lstStyle/>
+          <a:p>
             <a:pPr algn="l" marL="342900" indent="-342900">
               <a:lnSpc>
                 <a:spcPts val="1620"/>
@@ -2681,7 +3274,7 @@
                 <a:ea typeface="Arial" pitchFamily="34" charset="-122"/>
                 <a:cs typeface="Arial" pitchFamily="34" charset="-120"/>
               </a:rPr>
-              <a:t>Tier up:</a:t>
+              <a:t>Tāḍāsana</a:t>
             </a:r>
             <a:pPr algn="l" indent="0" marL="0">
               <a:lnSpc>
@@ -2701,7 +3294,7 @@
                 <a:ea typeface="Arial" pitchFamily="34" charset="-122"/>
                 <a:cs typeface="Arial" pitchFamily="34" charset="-120"/>
               </a:rPr>
-              <a:t> Read a 1-page introduction to the polyvagal theory (Stephen Porges). What does it say about how social safety affects the vagus nerve?</a:t>
+              <a:t>, 30 sec.</a:t>
             </a:r>
             <a:endParaRPr lang="en-US" sz="1200" dirty="0"/>
           </a:p>
@@ -2725,7 +3318,7 @@
                 <a:ea typeface="Arial" pitchFamily="34" charset="-122"/>
                 <a:cs typeface="Arial" pitchFamily="34" charset="-120"/>
               </a:rPr>
-              <a:t>Tier down:</a:t>
+              <a:t>Uttānāsana</a:t>
             </a:r>
             <a:pPr algn="l" indent="0" marL="0">
               <a:lnSpc>
@@ -2745,7 +3338,31 @@
                 <a:ea typeface="Arial" pitchFamily="34" charset="-122"/>
                 <a:cs typeface="Arial" pitchFamily="34" charset="-120"/>
               </a:rPr>
-              <a:t> Just remember: </a:t>
+              <a:t> (standing forward fold), 30 sec — let the head hang.</a:t>
+            </a:r>
+            <a:endParaRPr lang="en-US" sz="1200" dirty="0"/>
+          </a:p>
+          <a:p>
+            <a:pPr algn="l" marL="342900" indent="-342900">
+              <a:lnSpc>
+                <a:spcPts val="1620"/>
+              </a:lnSpc>
+              <a:spcAft>
+                <a:spcPts val="300"/>
+              </a:spcAft>
+              <a:buSzPct val="100000"/>
+              <a:buChar char="•"/>
+            </a:pPr>
+            <a:r>
+              <a:rPr lang="en-US" sz="1200" b="1" dirty="0">
+                <a:solidFill>
+                  <a:srgbClr val="1C2833"/>
+                </a:solidFill>
+                <a:latin typeface="Arial" pitchFamily="34" charset="0"/>
+                <a:ea typeface="Arial" pitchFamily="34" charset="-122"/>
+                <a:cs typeface="Arial" pitchFamily="34" charset="-120"/>
+              </a:rPr>
+              <a:t>Balāsana</a:t>
             </a:r>
             <a:pPr algn="l" indent="0" marL="0">
               <a:lnSpc>
@@ -2757,15 +3374,39 @@
               <a:buNone/>
             </a:pPr>
             <a:r>
-              <a:rPr lang="en-US" sz="1200" i="1" dirty="0">
-                <a:solidFill>
-                  <a:srgbClr val="1C2833"/>
-                </a:solidFill>
-                <a:latin typeface="Arial" pitchFamily="34" charset="0"/>
-                <a:ea typeface="Arial" pitchFamily="34" charset="-122"/>
-                <a:cs typeface="Arial" pitchFamily="34" charset="-120"/>
-              </a:rPr>
-              <a:t>slow exhale = calm body</a:t>
+              <a:rPr lang="en-US" sz="1200" dirty="0">
+                <a:solidFill>
+                  <a:srgbClr val="1C2833"/>
+                </a:solidFill>
+                <a:latin typeface="Arial" pitchFamily="34" charset="0"/>
+                <a:ea typeface="Arial" pitchFamily="34" charset="-122"/>
+                <a:cs typeface="Arial" pitchFamily="34" charset="-120"/>
+              </a:rPr>
+              <a:t> (child's pose), 60 sec.</a:t>
+            </a:r>
+            <a:endParaRPr lang="en-US" sz="1200" dirty="0"/>
+          </a:p>
+          <a:p>
+            <a:pPr algn="l" marL="342900" indent="-342900">
+              <a:lnSpc>
+                <a:spcPts val="1620"/>
+              </a:lnSpc>
+              <a:spcAft>
+                <a:spcPts val="300"/>
+              </a:spcAft>
+              <a:buSzPct val="100000"/>
+              <a:buChar char="•"/>
+            </a:pPr>
+            <a:r>
+              <a:rPr lang="en-US" sz="1200" b="1" dirty="0">
+                <a:solidFill>
+                  <a:srgbClr val="1C2833"/>
+                </a:solidFill>
+                <a:latin typeface="Arial" pitchFamily="34" charset="0"/>
+                <a:ea typeface="Arial" pitchFamily="34" charset="-122"/>
+                <a:cs typeface="Arial" pitchFamily="34" charset="-120"/>
+              </a:rPr>
+              <a:t>Sukhāsana</a:t>
             </a:r>
             <a:pPr algn="l" indent="0" marL="0">
               <a:lnSpc>
@@ -2785,15 +3426,59 @@
                 <a:ea typeface="Arial" pitchFamily="34" charset="-122"/>
                 <a:cs typeface="Arial" pitchFamily="34" charset="-120"/>
               </a:rPr>
-              <a:t>. The other details can come later.</a:t>
+              <a:t>, counted breath (4 in, 4 out), 60 sec.</a:t>
             </a:r>
             <a:endParaRPr lang="en-US" sz="1200" dirty="0"/>
           </a:p>
-        </p:txBody>
-      </p:sp>
-      <p:sp>
-        <p:nvSpPr>
-          <p:cNvPr id="5" name="Text 3"/>
+          <a:p>
+            <a:pPr algn="l" marL="342900" indent="-342900">
+              <a:lnSpc>
+                <a:spcPts val="1620"/>
+              </a:lnSpc>
+              <a:spcAft>
+                <a:spcPts val="300"/>
+              </a:spcAft>
+              <a:buSzPct val="100000"/>
+              <a:buChar char="•"/>
+            </a:pPr>
+            <a:r>
+              <a:rPr lang="en-US" sz="1200" b="1" dirty="0">
+                <a:solidFill>
+                  <a:srgbClr val="1C2833"/>
+                </a:solidFill>
+                <a:latin typeface="Arial" pitchFamily="34" charset="0"/>
+                <a:ea typeface="Arial" pitchFamily="34" charset="-122"/>
+                <a:cs typeface="Arial" pitchFamily="34" charset="-120"/>
+              </a:rPr>
+              <a:t>Tāḍāsana</a:t>
+            </a:r>
+            <a:pPr algn="l" indent="0" marL="0">
+              <a:lnSpc>
+                <a:spcPts val="1620"/>
+              </a:lnSpc>
+              <a:spcAft>
+                <a:spcPts val="300"/>
+              </a:spcAft>
+              <a:buNone/>
+            </a:pPr>
+            <a:r>
+              <a:rPr lang="en-US" sz="1200" dirty="0">
+                <a:solidFill>
+                  <a:srgbClr val="1C2833"/>
+                </a:solidFill>
+                <a:latin typeface="Arial" pitchFamily="34" charset="0"/>
+                <a:ea typeface="Arial" pitchFamily="34" charset="-122"/>
+                <a:cs typeface="Arial" pitchFamily="34" charset="-120"/>
+              </a:rPr>
+              <a:t> to close, 30 sec.</a:t>
+            </a:r>
+            <a:endParaRPr lang="en-US" sz="1200" dirty="0"/>
+          </a:p>
+        </p:txBody>
+      </p:sp>
+      <p:sp>
+        <p:nvSpPr>
+          <p:cNvPr id="6" name="Text 4"/>
           <p:cNvSpPr/>
           <p:nvPr/>
         </p:nvSpPr>
@@ -2943,7 +3628,7 @@
                 <a:ea typeface="Georgia" pitchFamily="34" charset="-122"/>
                 <a:cs typeface="Georgia" pitchFamily="34" charset="-120"/>
               </a:rPr>
-              <a:t>Teacher notes</a:t>
+              <a:t>Practice (10 min) — Stress-recovery sequence (cont.)</a:t>
             </a:r>
             <a:endParaRPr lang="en-US" sz="1800" dirty="0"/>
           </a:p>
@@ -2958,7 +3643,7 @@
         <p:spPr>
           <a:xfrm>
             <a:off x="406301" y="870942"/>
-            <a:ext cx="8498026" cy="639812"/>
+            <a:ext cx="8498026" cy="426541"/>
           </a:xfrm>
           <a:prstGeom prst="rect">
             <a:avLst/>
@@ -2991,7 +3676,30 @@
                 <a:ea typeface="Arial" pitchFamily="34" charset="-122"/>
                 <a:cs typeface="Arial" pitchFamily="34" charset="-120"/>
               </a:rPr>
-              <a:t>– This is the most accessible "why does this work?" answer at Middle band. Connect it explicitly to PE class and biology if those teachers are interested. – Some students may ask whether yoga is "scientifically proven." Honest answer: many specific health claims for yoga are still under study; the physiological mechanism of slow-breath calming is well-established.</a:t>
+              <a:t>Total: 3.5 min. Practice once together. </a:t>
+            </a:r>
+            <a:pPr algn="l" indent="0" marL="0">
+              <a:lnSpc>
+                <a:spcPts val="1680"/>
+              </a:lnSpc>
+              <a:spcBef>
+                <a:spcPts val="300"/>
+              </a:spcBef>
+              <a:spcAft>
+                <a:spcPts val="300"/>
+              </a:spcAft>
+              <a:buNone/>
+            </a:pPr>
+            <a:r>
+              <a:rPr lang="en-US" sz="1200" i="1" dirty="0">
+                <a:solidFill>
+                  <a:srgbClr val="1C2833"/>
+                </a:solidFill>
+                <a:latin typeface="Arial" pitchFamily="34" charset="0"/>
+                <a:ea typeface="Arial" pitchFamily="34" charset="-122"/>
+                <a:cs typeface="Arial" pitchFamily="34" charset="-120"/>
+              </a:rPr>
+              <a:t>"Use this before exams. Use this when you're stressed. It works because of physiology, not magic."</a:t>
             </a:r>
             <a:endParaRPr lang="en-US" sz="1200" dirty="0"/>
           </a:p>
@@ -3149,7 +3857,7 @@
                 <a:ea typeface="Georgia" pitchFamily="34" charset="-122"/>
                 <a:cs typeface="Georgia" pitchFamily="34" charset="-120"/>
               </a:rPr>
-              <a:t>Citation(s) used in this lesson</a:t>
+              <a:t>Concept check (10 min)</a:t>
             </a:r>
             <a:endParaRPr lang="en-US" sz="1800" dirty="0"/>
           </a:p>
@@ -3163,8 +3871,8 @@
         </p:nvSpPr>
         <p:spPr>
           <a:xfrm>
-            <a:off x="406301" y="870942"/>
-            <a:ext cx="8498026" cy="426541"/>
+            <a:off x="634901" y="883593"/>
+            <a:ext cx="8102798" cy="1500783"/>
           </a:xfrm>
           <a:prstGeom prst="rect">
             <a:avLst/>
@@ -3176,8 +3884,214 @@
           <a:bodyPr wrap="square" lIns="0" tIns="0" rIns="0" bIns="0" rtlCol="0" anchor="t"/>
           <a:lstStyle/>
           <a:p>
+            <a:pPr algn="l" marL="342900" indent="-342900">
+              <a:lnSpc>
+                <a:spcPts val="1620"/>
+              </a:lnSpc>
+              <a:spcAft>
+                <a:spcPts val="300"/>
+              </a:spcAft>
+              <a:buSzPct val="100000"/>
+              <a:buChar char="•"/>
+            </a:pPr>
+            <a:r>
+              <a:rPr lang="en-US" sz="1200" dirty="0">
+                <a:solidFill>
+                  <a:srgbClr val="1C2833"/>
+                </a:solidFill>
+                <a:latin typeface="Arial" pitchFamily="34" charset="0"/>
+                <a:ea typeface="Arial" pitchFamily="34" charset="-122"/>
+                <a:cs typeface="Arial" pitchFamily="34" charset="-120"/>
+              </a:rPr>
+              <a:t>5-question worksheet:</a:t>
+            </a:r>
+            <a:endParaRPr lang="en-US" sz="1200" dirty="0"/>
+          </a:p>
+          <a:p>
+            <a:pPr algn="l" marL="342900" indent="-342900">
+              <a:lnSpc>
+                <a:spcPts val="1620"/>
+              </a:lnSpc>
+              <a:spcAft>
+                <a:spcPts val="300"/>
+              </a:spcAft>
+              <a:buSzPct val="100000"/>
+              <a:buChar char="•"/>
+            </a:pPr>
+            <a:r>
+              <a:rPr lang="en-US" sz="1200" dirty="0">
+                <a:solidFill>
+                  <a:srgbClr val="1C2833"/>
+                </a:solidFill>
+                <a:latin typeface="Arial" pitchFamily="34" charset="0"/>
+                <a:ea typeface="Arial" pitchFamily="34" charset="-122"/>
+                <a:cs typeface="Arial" pitchFamily="34" charset="-120"/>
+              </a:rPr>
+              <a:t>Which branch of the ANS is "fight or flight"?</a:t>
+            </a:r>
+            <a:endParaRPr lang="en-US" sz="1200" dirty="0"/>
+          </a:p>
+          <a:p>
+            <a:pPr algn="l" marL="342900" indent="-342900">
+              <a:lnSpc>
+                <a:spcPts val="1620"/>
+              </a:lnSpc>
+              <a:spcAft>
+                <a:spcPts val="300"/>
+              </a:spcAft>
+              <a:buSzPct val="100000"/>
+              <a:buChar char="•"/>
+            </a:pPr>
+            <a:r>
+              <a:rPr lang="en-US" sz="1200" dirty="0">
+                <a:solidFill>
+                  <a:srgbClr val="1C2833"/>
+                </a:solidFill>
+                <a:latin typeface="Arial" pitchFamily="34" charset="0"/>
+                <a:ea typeface="Arial" pitchFamily="34" charset="-122"/>
+                <a:cs typeface="Arial" pitchFamily="34" charset="-120"/>
+              </a:rPr>
+              <a:t>Which is "rest and digest"?</a:t>
+            </a:r>
+            <a:endParaRPr lang="en-US" sz="1200" dirty="0"/>
+          </a:p>
+          <a:p>
+            <a:pPr algn="l" marL="342900" indent="-342900">
+              <a:lnSpc>
+                <a:spcPts val="1620"/>
+              </a:lnSpc>
+              <a:spcAft>
+                <a:spcPts val="300"/>
+              </a:spcAft>
+              <a:buSzPct val="100000"/>
+              <a:buChar char="•"/>
+            </a:pPr>
+            <a:r>
+              <a:rPr lang="en-US" sz="1200" dirty="0">
+                <a:solidFill>
+                  <a:srgbClr val="1C2833"/>
+                </a:solidFill>
+                <a:latin typeface="Arial" pitchFamily="34" charset="0"/>
+                <a:ea typeface="Arial" pitchFamily="34" charset="-122"/>
+                <a:cs typeface="Arial" pitchFamily="34" charset="-120"/>
+              </a:rPr>
+              <a:t>Which nerve carries most of the parasympathetic signals?</a:t>
+            </a:r>
+            <a:endParaRPr lang="en-US" sz="1200" dirty="0"/>
+          </a:p>
+          <a:p>
+            <a:pPr algn="l" marL="342900" indent="-342900">
+              <a:lnSpc>
+                <a:spcPts val="1620"/>
+              </a:lnSpc>
+              <a:spcAft>
+                <a:spcPts val="300"/>
+              </a:spcAft>
+              <a:buSzPct val="100000"/>
+              <a:buChar char="•"/>
+            </a:pPr>
+            <a:r>
+              <a:rPr lang="en-US" sz="1200" dirty="0">
+                <a:solidFill>
+                  <a:srgbClr val="1C2833"/>
+                </a:solidFill>
+                <a:latin typeface="Arial" pitchFamily="34" charset="0"/>
+                <a:ea typeface="Arial" pitchFamily="34" charset="-122"/>
+                <a:cs typeface="Arial" pitchFamily="34" charset="-120"/>
+              </a:rPr>
+              <a:t>Does a slow exhale stimulate sympathetic or parasympathetic?</a:t>
+            </a:r>
+            <a:endParaRPr lang="en-US" sz="1200" dirty="0"/>
+          </a:p>
+          <a:p>
+            <a:pPr algn="l" marL="342900" indent="-342900">
+              <a:lnSpc>
+                <a:spcPts val="1620"/>
+              </a:lnSpc>
+              <a:spcAft>
+                <a:spcPts val="300"/>
+              </a:spcAft>
+              <a:buSzPct val="100000"/>
+              <a:buChar char="•"/>
+            </a:pPr>
+            <a:r>
+              <a:rPr lang="en-US" sz="1200" dirty="0">
+                <a:solidFill>
+                  <a:srgbClr val="1C2833"/>
+                </a:solidFill>
+                <a:latin typeface="Arial" pitchFamily="34" charset="0"/>
+                <a:ea typeface="Arial" pitchFamily="34" charset="-122"/>
+                <a:cs typeface="Arial" pitchFamily="34" charset="-120"/>
+              </a:rPr>
+              <a:t>Why does </a:t>
+            </a:r>
             <a:pPr algn="l" indent="0" marL="0">
               <a:lnSpc>
+                <a:spcPts val="1620"/>
+              </a:lnSpc>
+              <a:spcAft>
+                <a:spcPts val="300"/>
+              </a:spcAft>
+              <a:buNone/>
+            </a:pPr>
+            <a:r>
+              <a:rPr lang="en-US" sz="1200" i="1" dirty="0">
+                <a:solidFill>
+                  <a:srgbClr val="1C2833"/>
+                </a:solidFill>
+                <a:latin typeface="Arial" pitchFamily="34" charset="0"/>
+                <a:ea typeface="Arial" pitchFamily="34" charset="-122"/>
+                <a:cs typeface="Arial" pitchFamily="34" charset="-120"/>
+              </a:rPr>
+              <a:t>balāsana</a:t>
+            </a:r>
+            <a:pPr algn="l" indent="0" marL="0">
+              <a:lnSpc>
+                <a:spcPts val="1620"/>
+              </a:lnSpc>
+              <a:spcAft>
+                <a:spcPts val="300"/>
+              </a:spcAft>
+              <a:buNone/>
+            </a:pPr>
+            <a:r>
+              <a:rPr lang="en-US" sz="1200" dirty="0">
+                <a:solidFill>
+                  <a:srgbClr val="1C2833"/>
+                </a:solidFill>
+                <a:latin typeface="Arial" pitchFamily="34" charset="0"/>
+                <a:ea typeface="Arial" pitchFamily="34" charset="-122"/>
+                <a:cs typeface="Arial" pitchFamily="34" charset="-120"/>
+              </a:rPr>
+              <a:t> feel calming?</a:t>
+            </a:r>
+            <a:endParaRPr lang="en-US" sz="1200" dirty="0"/>
+          </a:p>
+        </p:txBody>
+      </p:sp>
+      <p:sp>
+        <p:nvSpPr>
+          <p:cNvPr id="5" name="Text 3"/>
+          <p:cNvSpPr/>
+          <p:nvPr/>
+        </p:nvSpPr>
+        <p:spPr>
+          <a:xfrm>
+            <a:off x="406301" y="4434929"/>
+            <a:ext cx="8498026" cy="213271"/>
+          </a:xfrm>
+          <a:prstGeom prst="rect">
+            <a:avLst/>
+          </a:prstGeom>
+          <a:noFill/>
+          <a:ln/>
+        </p:spPr>
+        <p:txBody>
+          <a:bodyPr wrap="square" lIns="0" tIns="0" rIns="0" bIns="0" rtlCol="0" anchor="t"/>
+          <a:lstStyle/>
+          <a:p>
+            <a:pPr algn="l" indent="0" marL="0">
+              <a:lnSpc>
                 <a:spcPts val="1680"/>
               </a:lnSpc>
               <a:spcBef>
@@ -3197,7 +4111,1199 @@
                 <a:ea typeface="Arial" pitchFamily="34" charset="-122"/>
                 <a:cs typeface="Arial" pitchFamily="34" charset="-120"/>
               </a:rPr>
-              <a:t>– No new RAG citations (this is a modern-physiology lesson). – Modern reference: any introductory text on autonomic nervous system; for teacher, Stephen Porges' polyvagal theory (advanced).</a:t>
+              <a:t>Middle ·  · IKS Curriculum</a:t>
+            </a:r>
+            <a:endParaRPr lang="en-US" sz="1200" dirty="0"/>
+          </a:p>
+        </p:txBody>
+      </p:sp>
+    </p:spTree>
+  </p:cSld>
+  <p:clrMapOvr>
+    <a:masterClrMapping/>
+  </p:clrMapOvr>
+</p:sld>
+</file>
+
+<file path=ppt/slides/slide14.xml><?xml version="1.0" encoding="utf-8"?>
+<p:sld xmlns:a="http://schemas.openxmlformats.org/drawingml/2006/main" xmlns:r="http://schemas.openxmlformats.org/officeDocument/2006/relationships" xmlns:p="http://schemas.openxmlformats.org/presentationml/2006/main">
+  <p:cSld name="Slide 14">
+    <p:bg>
+      <p:bgPr>
+        <a:solidFill>
+          <a:srgbClr val="FFFFFF"/>
+        </a:solidFill>
+      </p:bgPr>
+    </p:bg>
+    <p:spTree>
+      <p:nvGrpSpPr>
+        <p:cNvPr id="1" name=""/>
+        <p:cNvGrpSpPr/>
+        <p:nvPr/>
+      </p:nvGrpSpPr>
+      <p:grpSpPr>
+        <a:xfrm>
+          <a:off x="0" y="0"/>
+          <a:ext cx="0" cy="0"/>
+          <a:chOff x="0" y="0"/>
+          <a:chExt cx="0" cy="0"/>
+        </a:xfrm>
+      </p:grpSpPr>
+      <p:sp>
+        <p:nvSpPr>
+          <p:cNvPr id="2" name="Text 0"/>
+          <p:cNvSpPr/>
+          <p:nvPr/>
+        </p:nvSpPr>
+        <p:spPr>
+          <a:xfrm>
+            <a:off x="0" y="0"/>
+            <a:ext cx="9144000" cy="101501"/>
+          </a:xfrm>
+          <a:prstGeom prst="rect">
+            <a:avLst/>
+          </a:prstGeom>
+          <a:solidFill>
+            <a:srgbClr val="277884"/>
+          </a:solidFill>
+          <a:ln/>
+        </p:spPr>
+        <p:txBody>
+          <a:bodyPr wrap="square" rtlCol="0" anchor="ctr"/>
+          <a:lstStyle/>
+          <a:p>
+            <a:pPr indent="0" marL="0">
+              <a:buNone/>
+            </a:pPr>
+            <a:endParaRPr lang="en-US" dirty="0"/>
+          </a:p>
+        </p:txBody>
+      </p:sp>
+      <p:sp>
+        <p:nvSpPr>
+          <p:cNvPr id="3" name="Text 1"/>
+          <p:cNvSpPr/>
+          <p:nvPr/>
+        </p:nvSpPr>
+        <p:spPr>
+          <a:xfrm>
+            <a:off x="406301" y="457051"/>
+            <a:ext cx="8498026" cy="274290"/>
+          </a:xfrm>
+          <a:prstGeom prst="rect">
+            <a:avLst/>
+          </a:prstGeom>
+          <a:noFill/>
+          <a:ln/>
+        </p:spPr>
+        <p:txBody>
+          <a:bodyPr wrap="square" lIns="0" tIns="0" rIns="0" bIns="0" rtlCol="0" anchor="t"/>
+          <a:lstStyle/>
+          <a:p>
+            <a:pPr algn="l" indent="0" marL="0">
+              <a:lnSpc>
+                <a:spcPts val="2160"/>
+              </a:lnSpc>
+              <a:spcBef>
+                <a:spcPts val="600"/>
+              </a:spcBef>
+              <a:spcAft>
+                <a:spcPts val="800"/>
+              </a:spcAft>
+              <a:buNone/>
+            </a:pPr>
+            <a:r>
+              <a:rPr lang="en-US" sz="1800" b="1" dirty="0">
+                <a:solidFill>
+                  <a:srgbClr val="FE4447"/>
+                </a:solidFill>
+                <a:latin typeface="Georgia" pitchFamily="34" charset="0"/>
+                <a:ea typeface="Georgia" pitchFamily="34" charset="-122"/>
+                <a:cs typeface="Georgia" pitchFamily="34" charset="-120"/>
+              </a:rPr>
+              <a:t>Wrap-up (3 min)</a:t>
+            </a:r>
+            <a:endParaRPr lang="en-US" sz="1800" dirty="0"/>
+          </a:p>
+        </p:txBody>
+      </p:sp>
+      <p:sp>
+        <p:nvSpPr>
+          <p:cNvPr id="4" name="Text 2"/>
+          <p:cNvSpPr/>
+          <p:nvPr/>
+        </p:nvSpPr>
+        <p:spPr>
+          <a:xfrm>
+            <a:off x="634901" y="883593"/>
+            <a:ext cx="8102798" cy="525661"/>
+          </a:xfrm>
+          <a:prstGeom prst="rect">
+            <a:avLst/>
+          </a:prstGeom>
+          <a:noFill/>
+          <a:ln/>
+        </p:spPr>
+        <p:txBody>
+          <a:bodyPr wrap="square" lIns="0" tIns="0" rIns="0" bIns="0" rtlCol="0" anchor="t"/>
+          <a:lstStyle/>
+          <a:p>
+            <a:pPr algn="l" marL="342900" indent="-342900">
+              <a:lnSpc>
+                <a:spcPts val="1620"/>
+              </a:lnSpc>
+              <a:spcAft>
+                <a:spcPts val="300"/>
+              </a:spcAft>
+              <a:buSzPct val="100000"/>
+              <a:buChar char="•"/>
+            </a:pPr>
+            <a:r>
+              <a:rPr lang="en-US" sz="1200" dirty="0">
+                <a:solidFill>
+                  <a:srgbClr val="1C2833"/>
+                </a:solidFill>
+                <a:latin typeface="Arial" pitchFamily="34" charset="0"/>
+                <a:ea typeface="Arial" pitchFamily="34" charset="-122"/>
+                <a:cs typeface="Arial" pitchFamily="34" charset="-120"/>
+              </a:rPr>
+              <a:t>2 student shares on the worksheet answers.</a:t>
+            </a:r>
+            <a:endParaRPr lang="en-US" sz="1200" dirty="0"/>
+          </a:p>
+          <a:p>
+            <a:pPr algn="l" marL="342900" indent="-342900">
+              <a:lnSpc>
+                <a:spcPts val="1620"/>
+              </a:lnSpc>
+              <a:spcAft>
+                <a:spcPts val="300"/>
+              </a:spcAft>
+              <a:buSzPct val="100000"/>
+              <a:buChar char="•"/>
+            </a:pPr>
+            <a:r>
+              <a:rPr lang="en-US" sz="1200" dirty="0">
+                <a:solidFill>
+                  <a:srgbClr val="1C2833"/>
+                </a:solidFill>
+                <a:latin typeface="Arial" pitchFamily="34" charset="0"/>
+                <a:ea typeface="Arial" pitchFamily="34" charset="-122"/>
+                <a:cs typeface="Arial" pitchFamily="34" charset="-120"/>
+              </a:rPr>
+              <a:t>Preview Day 8: </a:t>
+            </a:r>
+            <a:pPr algn="l" indent="0" marL="0">
+              <a:lnSpc>
+                <a:spcPts val="1620"/>
+              </a:lnSpc>
+              <a:spcAft>
+                <a:spcPts val="300"/>
+              </a:spcAft>
+              <a:buNone/>
+            </a:pPr>
+            <a:r>
+              <a:rPr lang="en-US" sz="1200" i="1" dirty="0">
+                <a:solidFill>
+                  <a:srgbClr val="1C2833"/>
+                </a:solidFill>
+                <a:latin typeface="Arial" pitchFamily="34" charset="0"/>
+                <a:ea typeface="Arial" pitchFamily="34" charset="-122"/>
+                <a:cs typeface="Arial" pitchFamily="34" charset="-120"/>
+              </a:rPr>
+              <a:t>"Project work begins. You'll design your own 5-minute routine for your chosen audience."</a:t>
+            </a:r>
+            <a:endParaRPr lang="en-US" sz="1200" dirty="0"/>
+          </a:p>
+        </p:txBody>
+      </p:sp>
+      <p:sp>
+        <p:nvSpPr>
+          <p:cNvPr id="5" name="Text 3"/>
+          <p:cNvSpPr/>
+          <p:nvPr/>
+        </p:nvSpPr>
+        <p:spPr>
+          <a:xfrm>
+            <a:off x="406301" y="4434929"/>
+            <a:ext cx="8498026" cy="213271"/>
+          </a:xfrm>
+          <a:prstGeom prst="rect">
+            <a:avLst/>
+          </a:prstGeom>
+          <a:noFill/>
+          <a:ln/>
+        </p:spPr>
+        <p:txBody>
+          <a:bodyPr wrap="square" lIns="0" tIns="0" rIns="0" bIns="0" rtlCol="0" anchor="t"/>
+          <a:lstStyle/>
+          <a:p>
+            <a:pPr algn="l" indent="0" marL="0">
+              <a:lnSpc>
+                <a:spcPts val="1680"/>
+              </a:lnSpc>
+              <a:spcBef>
+                <a:spcPts val="300"/>
+              </a:spcBef>
+              <a:spcAft>
+                <a:spcPts val="300"/>
+              </a:spcAft>
+              <a:buNone/>
+            </a:pPr>
+            <a:r>
+              <a:rPr lang="en-US" sz="1200" dirty="0">
+                <a:solidFill>
+                  <a:srgbClr val="1C2833"/>
+                </a:solidFill>
+                <a:latin typeface="Arial" pitchFamily="34" charset="0"/>
+                <a:ea typeface="Arial" pitchFamily="34" charset="-122"/>
+                <a:cs typeface="Arial" pitchFamily="34" charset="-120"/>
+              </a:rPr>
+              <a:t>Middle ·  · IKS Curriculum</a:t>
+            </a:r>
+            <a:endParaRPr lang="en-US" sz="1200" dirty="0"/>
+          </a:p>
+        </p:txBody>
+      </p:sp>
+    </p:spTree>
+  </p:cSld>
+  <p:clrMapOvr>
+    <a:masterClrMapping/>
+  </p:clrMapOvr>
+</p:sld>
+</file>
+
+<file path=ppt/slides/slide15.xml><?xml version="1.0" encoding="utf-8"?>
+<p:sld xmlns:a="http://schemas.openxmlformats.org/drawingml/2006/main" xmlns:r="http://schemas.openxmlformats.org/officeDocument/2006/relationships" xmlns:p="http://schemas.openxmlformats.org/presentationml/2006/main">
+  <p:cSld name="Slide 15">
+    <p:bg>
+      <p:bgPr>
+        <a:solidFill>
+          <a:srgbClr val="FFFFFF"/>
+        </a:solidFill>
+      </p:bgPr>
+    </p:bg>
+    <p:spTree>
+      <p:nvGrpSpPr>
+        <p:cNvPr id="1" name=""/>
+        <p:cNvGrpSpPr/>
+        <p:nvPr/>
+      </p:nvGrpSpPr>
+      <p:grpSpPr>
+        <a:xfrm>
+          <a:off x="0" y="0"/>
+          <a:ext cx="0" cy="0"/>
+          <a:chOff x="0" y="0"/>
+          <a:chExt cx="0" cy="0"/>
+        </a:xfrm>
+      </p:grpSpPr>
+      <p:sp>
+        <p:nvSpPr>
+          <p:cNvPr id="2" name="Text 0"/>
+          <p:cNvSpPr/>
+          <p:nvPr/>
+        </p:nvSpPr>
+        <p:spPr>
+          <a:xfrm>
+            <a:off x="0" y="0"/>
+            <a:ext cx="9144000" cy="101501"/>
+          </a:xfrm>
+          <a:prstGeom prst="rect">
+            <a:avLst/>
+          </a:prstGeom>
+          <a:solidFill>
+            <a:srgbClr val="277884"/>
+          </a:solidFill>
+          <a:ln/>
+        </p:spPr>
+        <p:txBody>
+          <a:bodyPr wrap="square" rtlCol="0" anchor="ctr"/>
+          <a:lstStyle/>
+          <a:p>
+            <a:pPr indent="0" marL="0">
+              <a:buNone/>
+            </a:pPr>
+            <a:endParaRPr lang="en-US" dirty="0"/>
+          </a:p>
+        </p:txBody>
+      </p:sp>
+      <p:sp>
+        <p:nvSpPr>
+          <p:cNvPr id="3" name="Text 1"/>
+          <p:cNvSpPr/>
+          <p:nvPr/>
+        </p:nvSpPr>
+        <p:spPr>
+          <a:xfrm>
+            <a:off x="406301" y="457051"/>
+            <a:ext cx="8498026" cy="274290"/>
+          </a:xfrm>
+          <a:prstGeom prst="rect">
+            <a:avLst/>
+          </a:prstGeom>
+          <a:noFill/>
+          <a:ln/>
+        </p:spPr>
+        <p:txBody>
+          <a:bodyPr wrap="square" lIns="0" tIns="0" rIns="0" bIns="0" rtlCol="0" anchor="t"/>
+          <a:lstStyle/>
+          <a:p>
+            <a:pPr algn="l" indent="0" marL="0">
+              <a:lnSpc>
+                <a:spcPts val="2160"/>
+              </a:lnSpc>
+              <a:spcBef>
+                <a:spcPts val="600"/>
+              </a:spcBef>
+              <a:spcAft>
+                <a:spcPts val="800"/>
+              </a:spcAft>
+              <a:buNone/>
+            </a:pPr>
+            <a:r>
+              <a:rPr lang="en-US" sz="1800" b="1" dirty="0">
+                <a:solidFill>
+                  <a:srgbClr val="FE4447"/>
+                </a:solidFill>
+                <a:latin typeface="Georgia" pitchFamily="34" charset="0"/>
+                <a:ea typeface="Georgia" pitchFamily="34" charset="-122"/>
+                <a:cs typeface="Georgia" pitchFamily="34" charset="-120"/>
+              </a:rPr>
+              <a:t>Homework</a:t>
+            </a:r>
+            <a:endParaRPr lang="en-US" sz="1800" dirty="0"/>
+          </a:p>
+        </p:txBody>
+      </p:sp>
+      <p:sp>
+        <p:nvSpPr>
+          <p:cNvPr id="4" name="Text 2"/>
+          <p:cNvSpPr/>
+          <p:nvPr/>
+        </p:nvSpPr>
+        <p:spPr>
+          <a:xfrm>
+            <a:off x="634901" y="883593"/>
+            <a:ext cx="8102798" cy="731341"/>
+          </a:xfrm>
+          <a:prstGeom prst="rect">
+            <a:avLst/>
+          </a:prstGeom>
+          <a:noFill/>
+          <a:ln/>
+        </p:spPr>
+        <p:txBody>
+          <a:bodyPr wrap="square" lIns="0" tIns="0" rIns="0" bIns="0" rtlCol="0" anchor="t"/>
+          <a:lstStyle/>
+          <a:p>
+            <a:pPr algn="l" marL="342900" indent="-342900">
+              <a:lnSpc>
+                <a:spcPts val="1620"/>
+              </a:lnSpc>
+              <a:spcAft>
+                <a:spcPts val="300"/>
+              </a:spcAft>
+              <a:buSzPct val="100000"/>
+              <a:buChar char="•"/>
+            </a:pPr>
+            <a:r>
+              <a:rPr lang="en-US" sz="1200" dirty="0">
+                <a:solidFill>
+                  <a:srgbClr val="1C2833"/>
+                </a:solidFill>
+                <a:latin typeface="Arial" pitchFamily="34" charset="0"/>
+                <a:ea typeface="Arial" pitchFamily="34" charset="-122"/>
+                <a:cs typeface="Arial" pitchFamily="34" charset="-120"/>
+              </a:rPr>
+              <a:t>Practise the stress-recovery sequence at least once before tomorrow's class. Note when (morning / before bed / before a difficult task).</a:t>
+            </a:r>
+            <a:endParaRPr lang="en-US" sz="1200" dirty="0"/>
+          </a:p>
+          <a:p>
+            <a:pPr algn="l" marL="342900" indent="-342900">
+              <a:lnSpc>
+                <a:spcPts val="1620"/>
+              </a:lnSpc>
+              <a:spcAft>
+                <a:spcPts val="300"/>
+              </a:spcAft>
+              <a:buSzPct val="100000"/>
+              <a:buChar char="•"/>
+            </a:pPr>
+            <a:r>
+              <a:rPr lang="en-US" sz="1200" dirty="0">
+                <a:solidFill>
+                  <a:srgbClr val="1C2833"/>
+                </a:solidFill>
+                <a:latin typeface="Arial" pitchFamily="34" charset="0"/>
+                <a:ea typeface="Arial" pitchFamily="34" charset="-122"/>
+                <a:cs typeface="Arial" pitchFamily="34" charset="-120"/>
+              </a:rPr>
+              <a:t>Bring all project planning materials tomorrow.</a:t>
+            </a:r>
+            <a:endParaRPr lang="en-US" sz="1200" dirty="0"/>
+          </a:p>
+        </p:txBody>
+      </p:sp>
+      <p:sp>
+        <p:nvSpPr>
+          <p:cNvPr id="5" name="Text 3"/>
+          <p:cNvSpPr/>
+          <p:nvPr/>
+        </p:nvSpPr>
+        <p:spPr>
+          <a:xfrm>
+            <a:off x="406301" y="4434929"/>
+            <a:ext cx="8498026" cy="213271"/>
+          </a:xfrm>
+          <a:prstGeom prst="rect">
+            <a:avLst/>
+          </a:prstGeom>
+          <a:noFill/>
+          <a:ln/>
+        </p:spPr>
+        <p:txBody>
+          <a:bodyPr wrap="square" lIns="0" tIns="0" rIns="0" bIns="0" rtlCol="0" anchor="t"/>
+          <a:lstStyle/>
+          <a:p>
+            <a:pPr algn="l" indent="0" marL="0">
+              <a:lnSpc>
+                <a:spcPts val="1680"/>
+              </a:lnSpc>
+              <a:spcBef>
+                <a:spcPts val="300"/>
+              </a:spcBef>
+              <a:spcAft>
+                <a:spcPts val="300"/>
+              </a:spcAft>
+              <a:buNone/>
+            </a:pPr>
+            <a:r>
+              <a:rPr lang="en-US" sz="1200" dirty="0">
+                <a:solidFill>
+                  <a:srgbClr val="1C2833"/>
+                </a:solidFill>
+                <a:latin typeface="Arial" pitchFamily="34" charset="0"/>
+                <a:ea typeface="Arial" pitchFamily="34" charset="-122"/>
+                <a:cs typeface="Arial" pitchFamily="34" charset="-120"/>
+              </a:rPr>
+              <a:t>Middle ·  · IKS Curriculum</a:t>
+            </a:r>
+            <a:endParaRPr lang="en-US" sz="1200" dirty="0"/>
+          </a:p>
+        </p:txBody>
+      </p:sp>
+    </p:spTree>
+  </p:cSld>
+  <p:clrMapOvr>
+    <a:masterClrMapping/>
+  </p:clrMapOvr>
+</p:sld>
+</file>
+
+<file path=ppt/slides/slide16.xml><?xml version="1.0" encoding="utf-8"?>
+<p:sld xmlns:a="http://schemas.openxmlformats.org/drawingml/2006/main" xmlns:r="http://schemas.openxmlformats.org/officeDocument/2006/relationships" xmlns:p="http://schemas.openxmlformats.org/presentationml/2006/main">
+  <p:cSld name="Slide 16">
+    <p:bg>
+      <p:bgPr>
+        <a:solidFill>
+          <a:srgbClr val="FFFFFF"/>
+        </a:solidFill>
+      </p:bgPr>
+    </p:bg>
+    <p:spTree>
+      <p:nvGrpSpPr>
+        <p:cNvPr id="1" name=""/>
+        <p:cNvGrpSpPr/>
+        <p:nvPr/>
+      </p:nvGrpSpPr>
+      <p:grpSpPr>
+        <a:xfrm>
+          <a:off x="0" y="0"/>
+          <a:ext cx="0" cy="0"/>
+          <a:chOff x="0" y="0"/>
+          <a:chExt cx="0" cy="0"/>
+        </a:xfrm>
+      </p:grpSpPr>
+      <p:sp>
+        <p:nvSpPr>
+          <p:cNvPr id="2" name="Text 0"/>
+          <p:cNvSpPr/>
+          <p:nvPr/>
+        </p:nvSpPr>
+        <p:spPr>
+          <a:xfrm>
+            <a:off x="0" y="0"/>
+            <a:ext cx="9144000" cy="101501"/>
+          </a:xfrm>
+          <a:prstGeom prst="rect">
+            <a:avLst/>
+          </a:prstGeom>
+          <a:solidFill>
+            <a:srgbClr val="277884"/>
+          </a:solidFill>
+          <a:ln/>
+        </p:spPr>
+        <p:txBody>
+          <a:bodyPr wrap="square" rtlCol="0" anchor="ctr"/>
+          <a:lstStyle/>
+          <a:p>
+            <a:pPr indent="0" marL="0">
+              <a:buNone/>
+            </a:pPr>
+            <a:endParaRPr lang="en-US" dirty="0"/>
+          </a:p>
+        </p:txBody>
+      </p:sp>
+      <p:sp>
+        <p:nvSpPr>
+          <p:cNvPr id="3" name="Text 1"/>
+          <p:cNvSpPr/>
+          <p:nvPr/>
+        </p:nvSpPr>
+        <p:spPr>
+          <a:xfrm>
+            <a:off x="406301" y="457051"/>
+            <a:ext cx="8498026" cy="274290"/>
+          </a:xfrm>
+          <a:prstGeom prst="rect">
+            <a:avLst/>
+          </a:prstGeom>
+          <a:noFill/>
+          <a:ln/>
+        </p:spPr>
+        <p:txBody>
+          <a:bodyPr wrap="square" lIns="0" tIns="0" rIns="0" bIns="0" rtlCol="0" anchor="t"/>
+          <a:lstStyle/>
+          <a:p>
+            <a:pPr algn="l" indent="0" marL="0">
+              <a:lnSpc>
+                <a:spcPts val="2160"/>
+              </a:lnSpc>
+              <a:spcBef>
+                <a:spcPts val="600"/>
+              </a:spcBef>
+              <a:spcAft>
+                <a:spcPts val="800"/>
+              </a:spcAft>
+              <a:buNone/>
+            </a:pPr>
+            <a:r>
+              <a:rPr lang="en-US" sz="1800" b="1" dirty="0">
+                <a:solidFill>
+                  <a:srgbClr val="FE4447"/>
+                </a:solidFill>
+                <a:latin typeface="Georgia" pitchFamily="34" charset="0"/>
+                <a:ea typeface="Georgia" pitchFamily="34" charset="-122"/>
+                <a:cs typeface="Georgia" pitchFamily="34" charset="-120"/>
+              </a:rPr>
+              <a:t>Differentiation</a:t>
+            </a:r>
+            <a:endParaRPr lang="en-US" sz="1800" dirty="0"/>
+          </a:p>
+        </p:txBody>
+      </p:sp>
+      <p:sp>
+        <p:nvSpPr>
+          <p:cNvPr id="4" name="Text 2"/>
+          <p:cNvSpPr/>
+          <p:nvPr/>
+        </p:nvSpPr>
+        <p:spPr>
+          <a:xfrm>
+            <a:off x="634901" y="883593"/>
+            <a:ext cx="8102798" cy="731341"/>
+          </a:xfrm>
+          <a:prstGeom prst="rect">
+            <a:avLst/>
+          </a:prstGeom>
+          <a:noFill/>
+          <a:ln/>
+        </p:spPr>
+        <p:txBody>
+          <a:bodyPr wrap="square" lIns="0" tIns="0" rIns="0" bIns="0" rtlCol="0" anchor="t"/>
+          <a:lstStyle/>
+          <a:p>
+            <a:pPr algn="l" marL="342900" indent="-342900">
+              <a:lnSpc>
+                <a:spcPts val="1620"/>
+              </a:lnSpc>
+              <a:spcAft>
+                <a:spcPts val="300"/>
+              </a:spcAft>
+              <a:buSzPct val="100000"/>
+              <a:buChar char="•"/>
+            </a:pPr>
+            <a:r>
+              <a:rPr lang="en-US" sz="1200" b="1" dirty="0">
+                <a:solidFill>
+                  <a:srgbClr val="1C2833"/>
+                </a:solidFill>
+                <a:latin typeface="Arial" pitchFamily="34" charset="0"/>
+                <a:ea typeface="Arial" pitchFamily="34" charset="-122"/>
+                <a:cs typeface="Arial" pitchFamily="34" charset="-120"/>
+              </a:rPr>
+              <a:t>Tier up:</a:t>
+            </a:r>
+            <a:pPr algn="l" indent="0" marL="0">
+              <a:lnSpc>
+                <a:spcPts val="1620"/>
+              </a:lnSpc>
+              <a:spcAft>
+                <a:spcPts val="300"/>
+              </a:spcAft>
+              <a:buNone/>
+            </a:pPr>
+            <a:r>
+              <a:rPr lang="en-US" sz="1200" dirty="0">
+                <a:solidFill>
+                  <a:srgbClr val="1C2833"/>
+                </a:solidFill>
+                <a:latin typeface="Arial" pitchFamily="34" charset="0"/>
+                <a:ea typeface="Arial" pitchFamily="34" charset="-122"/>
+                <a:cs typeface="Arial" pitchFamily="34" charset="-120"/>
+              </a:rPr>
+              <a:t> Read a 1-page introduction to the polyvagal theory (Stephen Porges). What does it say about how social safety affects the vagus nerve?</a:t>
+            </a:r>
+            <a:endParaRPr lang="en-US" sz="1200" dirty="0"/>
+          </a:p>
+          <a:p>
+            <a:pPr algn="l" marL="342900" indent="-342900">
+              <a:lnSpc>
+                <a:spcPts val="1620"/>
+              </a:lnSpc>
+              <a:spcAft>
+                <a:spcPts val="300"/>
+              </a:spcAft>
+              <a:buSzPct val="100000"/>
+              <a:buChar char="•"/>
+            </a:pPr>
+            <a:r>
+              <a:rPr lang="en-US" sz="1200" b="1" dirty="0">
+                <a:solidFill>
+                  <a:srgbClr val="1C2833"/>
+                </a:solidFill>
+                <a:latin typeface="Arial" pitchFamily="34" charset="0"/>
+                <a:ea typeface="Arial" pitchFamily="34" charset="-122"/>
+                <a:cs typeface="Arial" pitchFamily="34" charset="-120"/>
+              </a:rPr>
+              <a:t>Tier down:</a:t>
+            </a:r>
+            <a:pPr algn="l" indent="0" marL="0">
+              <a:lnSpc>
+                <a:spcPts val="1620"/>
+              </a:lnSpc>
+              <a:spcAft>
+                <a:spcPts val="300"/>
+              </a:spcAft>
+              <a:buNone/>
+            </a:pPr>
+            <a:r>
+              <a:rPr lang="en-US" sz="1200" dirty="0">
+                <a:solidFill>
+                  <a:srgbClr val="1C2833"/>
+                </a:solidFill>
+                <a:latin typeface="Arial" pitchFamily="34" charset="0"/>
+                <a:ea typeface="Arial" pitchFamily="34" charset="-122"/>
+                <a:cs typeface="Arial" pitchFamily="34" charset="-120"/>
+              </a:rPr>
+              <a:t> Just remember: </a:t>
+            </a:r>
+            <a:pPr algn="l" indent="0" marL="0">
+              <a:lnSpc>
+                <a:spcPts val="1620"/>
+              </a:lnSpc>
+              <a:spcAft>
+                <a:spcPts val="300"/>
+              </a:spcAft>
+              <a:buNone/>
+            </a:pPr>
+            <a:r>
+              <a:rPr lang="en-US" sz="1200" i="1" dirty="0">
+                <a:solidFill>
+                  <a:srgbClr val="1C2833"/>
+                </a:solidFill>
+                <a:latin typeface="Arial" pitchFamily="34" charset="0"/>
+                <a:ea typeface="Arial" pitchFamily="34" charset="-122"/>
+                <a:cs typeface="Arial" pitchFamily="34" charset="-120"/>
+              </a:rPr>
+              <a:t>slow exhale = calm body</a:t>
+            </a:r>
+            <a:pPr algn="l" indent="0" marL="0">
+              <a:lnSpc>
+                <a:spcPts val="1620"/>
+              </a:lnSpc>
+              <a:spcAft>
+                <a:spcPts val="300"/>
+              </a:spcAft>
+              <a:buNone/>
+            </a:pPr>
+            <a:r>
+              <a:rPr lang="en-US" sz="1200" dirty="0">
+                <a:solidFill>
+                  <a:srgbClr val="1C2833"/>
+                </a:solidFill>
+                <a:latin typeface="Arial" pitchFamily="34" charset="0"/>
+                <a:ea typeface="Arial" pitchFamily="34" charset="-122"/>
+                <a:cs typeface="Arial" pitchFamily="34" charset="-120"/>
+              </a:rPr>
+              <a:t>. The other details can come later.</a:t>
+            </a:r>
+            <a:endParaRPr lang="en-US" sz="1200" dirty="0"/>
+          </a:p>
+        </p:txBody>
+      </p:sp>
+      <p:sp>
+        <p:nvSpPr>
+          <p:cNvPr id="5" name="Text 3"/>
+          <p:cNvSpPr/>
+          <p:nvPr/>
+        </p:nvSpPr>
+        <p:spPr>
+          <a:xfrm>
+            <a:off x="406301" y="4434929"/>
+            <a:ext cx="8498026" cy="213271"/>
+          </a:xfrm>
+          <a:prstGeom prst="rect">
+            <a:avLst/>
+          </a:prstGeom>
+          <a:noFill/>
+          <a:ln/>
+        </p:spPr>
+        <p:txBody>
+          <a:bodyPr wrap="square" lIns="0" tIns="0" rIns="0" bIns="0" rtlCol="0" anchor="t"/>
+          <a:lstStyle/>
+          <a:p>
+            <a:pPr algn="l" indent="0" marL="0">
+              <a:lnSpc>
+                <a:spcPts val="1680"/>
+              </a:lnSpc>
+              <a:spcBef>
+                <a:spcPts val="300"/>
+              </a:spcBef>
+              <a:spcAft>
+                <a:spcPts val="300"/>
+              </a:spcAft>
+              <a:buNone/>
+            </a:pPr>
+            <a:r>
+              <a:rPr lang="en-US" sz="1200" dirty="0">
+                <a:solidFill>
+                  <a:srgbClr val="1C2833"/>
+                </a:solidFill>
+                <a:latin typeface="Arial" pitchFamily="34" charset="0"/>
+                <a:ea typeface="Arial" pitchFamily="34" charset="-122"/>
+                <a:cs typeface="Arial" pitchFamily="34" charset="-120"/>
+              </a:rPr>
+              <a:t>Middle ·  · IKS Curriculum</a:t>
+            </a:r>
+            <a:endParaRPr lang="en-US" sz="1200" dirty="0"/>
+          </a:p>
+        </p:txBody>
+      </p:sp>
+    </p:spTree>
+  </p:cSld>
+  <p:clrMapOvr>
+    <a:masterClrMapping/>
+  </p:clrMapOvr>
+</p:sld>
+</file>
+
+<file path=ppt/slides/slide17.xml><?xml version="1.0" encoding="utf-8"?>
+<p:sld xmlns:a="http://schemas.openxmlformats.org/drawingml/2006/main" xmlns:r="http://schemas.openxmlformats.org/officeDocument/2006/relationships" xmlns:p="http://schemas.openxmlformats.org/presentationml/2006/main">
+  <p:cSld name="Slide 17">
+    <p:bg>
+      <p:bgPr>
+        <a:solidFill>
+          <a:srgbClr val="FFFFFF"/>
+        </a:solidFill>
+      </p:bgPr>
+    </p:bg>
+    <p:spTree>
+      <p:nvGrpSpPr>
+        <p:cNvPr id="1" name=""/>
+        <p:cNvGrpSpPr/>
+        <p:nvPr/>
+      </p:nvGrpSpPr>
+      <p:grpSpPr>
+        <a:xfrm>
+          <a:off x="0" y="0"/>
+          <a:ext cx="0" cy="0"/>
+          <a:chOff x="0" y="0"/>
+          <a:chExt cx="0" cy="0"/>
+        </a:xfrm>
+      </p:grpSpPr>
+      <p:sp>
+        <p:nvSpPr>
+          <p:cNvPr id="2" name="Text 0"/>
+          <p:cNvSpPr/>
+          <p:nvPr/>
+        </p:nvSpPr>
+        <p:spPr>
+          <a:xfrm>
+            <a:off x="0" y="0"/>
+            <a:ext cx="9144000" cy="101501"/>
+          </a:xfrm>
+          <a:prstGeom prst="rect">
+            <a:avLst/>
+          </a:prstGeom>
+          <a:solidFill>
+            <a:srgbClr val="277884"/>
+          </a:solidFill>
+          <a:ln/>
+        </p:spPr>
+        <p:txBody>
+          <a:bodyPr wrap="square" rtlCol="0" anchor="ctr"/>
+          <a:lstStyle/>
+          <a:p>
+            <a:pPr indent="0" marL="0">
+              <a:buNone/>
+            </a:pPr>
+            <a:endParaRPr lang="en-US" dirty="0"/>
+          </a:p>
+        </p:txBody>
+      </p:sp>
+      <p:sp>
+        <p:nvSpPr>
+          <p:cNvPr id="3" name="Text 1"/>
+          <p:cNvSpPr/>
+          <p:nvPr/>
+        </p:nvSpPr>
+        <p:spPr>
+          <a:xfrm>
+            <a:off x="406301" y="457051"/>
+            <a:ext cx="8498026" cy="274290"/>
+          </a:xfrm>
+          <a:prstGeom prst="rect">
+            <a:avLst/>
+          </a:prstGeom>
+          <a:noFill/>
+          <a:ln/>
+        </p:spPr>
+        <p:txBody>
+          <a:bodyPr wrap="square" lIns="0" tIns="0" rIns="0" bIns="0" rtlCol="0" anchor="t"/>
+          <a:lstStyle/>
+          <a:p>
+            <a:pPr algn="l" indent="0" marL="0">
+              <a:lnSpc>
+                <a:spcPts val="2160"/>
+              </a:lnSpc>
+              <a:spcBef>
+                <a:spcPts val="600"/>
+              </a:spcBef>
+              <a:spcAft>
+                <a:spcPts val="800"/>
+              </a:spcAft>
+              <a:buNone/>
+            </a:pPr>
+            <a:r>
+              <a:rPr lang="en-US" sz="1800" b="1" dirty="0">
+                <a:solidFill>
+                  <a:srgbClr val="FE4447"/>
+                </a:solidFill>
+                <a:latin typeface="Georgia" pitchFamily="34" charset="0"/>
+                <a:ea typeface="Georgia" pitchFamily="34" charset="-122"/>
+                <a:cs typeface="Georgia" pitchFamily="34" charset="-120"/>
+              </a:rPr>
+              <a:t>Teacher notes</a:t>
+            </a:r>
+            <a:endParaRPr lang="en-US" sz="1800" dirty="0"/>
+          </a:p>
+        </p:txBody>
+      </p:sp>
+      <p:sp>
+        <p:nvSpPr>
+          <p:cNvPr id="4" name="Text 2"/>
+          <p:cNvSpPr/>
+          <p:nvPr/>
+        </p:nvSpPr>
+        <p:spPr>
+          <a:xfrm>
+            <a:off x="634901" y="883593"/>
+            <a:ext cx="8102798" cy="937022"/>
+          </a:xfrm>
+          <a:prstGeom prst="rect">
+            <a:avLst/>
+          </a:prstGeom>
+          <a:noFill/>
+          <a:ln/>
+        </p:spPr>
+        <p:txBody>
+          <a:bodyPr wrap="square" lIns="0" tIns="0" rIns="0" bIns="0" rtlCol="0" anchor="t"/>
+          <a:lstStyle/>
+          <a:p>
+            <a:pPr algn="l" marL="342900" indent="-342900">
+              <a:lnSpc>
+                <a:spcPts val="1620"/>
+              </a:lnSpc>
+              <a:spcAft>
+                <a:spcPts val="300"/>
+              </a:spcAft>
+              <a:buSzPct val="100000"/>
+              <a:buChar char="•"/>
+            </a:pPr>
+            <a:r>
+              <a:rPr lang="en-US" sz="1200" dirty="0">
+                <a:solidFill>
+                  <a:srgbClr val="1C2833"/>
+                </a:solidFill>
+                <a:latin typeface="Arial" pitchFamily="34" charset="0"/>
+                <a:ea typeface="Arial" pitchFamily="34" charset="-122"/>
+                <a:cs typeface="Arial" pitchFamily="34" charset="-120"/>
+              </a:rPr>
+              <a:t>This is the most accessible "why does this work?" answer at Middle band. Connect it explicitly to PE class and biology if those teachers are interested.</a:t>
+            </a:r>
+            <a:endParaRPr lang="en-US" sz="1200" dirty="0"/>
+          </a:p>
+          <a:p>
+            <a:pPr algn="l" marL="342900" indent="-342900">
+              <a:lnSpc>
+                <a:spcPts val="1620"/>
+              </a:lnSpc>
+              <a:spcAft>
+                <a:spcPts val="300"/>
+              </a:spcAft>
+              <a:buSzPct val="100000"/>
+              <a:buChar char="•"/>
+            </a:pPr>
+            <a:r>
+              <a:rPr lang="en-US" sz="1200" dirty="0">
+                <a:solidFill>
+                  <a:srgbClr val="1C2833"/>
+                </a:solidFill>
+                <a:latin typeface="Arial" pitchFamily="34" charset="0"/>
+                <a:ea typeface="Arial" pitchFamily="34" charset="-122"/>
+                <a:cs typeface="Arial" pitchFamily="34" charset="-120"/>
+              </a:rPr>
+              <a:t>Some students may ask whether yoga is "scientifically proven." Honest answer: many specific health claims for yoga are still under study; the physiological mechanism of slow-breath calming is well-established.</a:t>
+            </a:r>
+            <a:endParaRPr lang="en-US" sz="1200" dirty="0"/>
+          </a:p>
+        </p:txBody>
+      </p:sp>
+      <p:sp>
+        <p:nvSpPr>
+          <p:cNvPr id="5" name="Text 3"/>
+          <p:cNvSpPr/>
+          <p:nvPr/>
+        </p:nvSpPr>
+        <p:spPr>
+          <a:xfrm>
+            <a:off x="406301" y="4434929"/>
+            <a:ext cx="8498026" cy="213271"/>
+          </a:xfrm>
+          <a:prstGeom prst="rect">
+            <a:avLst/>
+          </a:prstGeom>
+          <a:noFill/>
+          <a:ln/>
+        </p:spPr>
+        <p:txBody>
+          <a:bodyPr wrap="square" lIns="0" tIns="0" rIns="0" bIns="0" rtlCol="0" anchor="t"/>
+          <a:lstStyle/>
+          <a:p>
+            <a:pPr algn="l" indent="0" marL="0">
+              <a:lnSpc>
+                <a:spcPts val="1680"/>
+              </a:lnSpc>
+              <a:spcBef>
+                <a:spcPts val="300"/>
+              </a:spcBef>
+              <a:spcAft>
+                <a:spcPts val="300"/>
+              </a:spcAft>
+              <a:buNone/>
+            </a:pPr>
+            <a:r>
+              <a:rPr lang="en-US" sz="1200" dirty="0">
+                <a:solidFill>
+                  <a:srgbClr val="1C2833"/>
+                </a:solidFill>
+                <a:latin typeface="Arial" pitchFamily="34" charset="0"/>
+                <a:ea typeface="Arial" pitchFamily="34" charset="-122"/>
+                <a:cs typeface="Arial" pitchFamily="34" charset="-120"/>
+              </a:rPr>
+              <a:t>Middle ·  · IKS Curriculum</a:t>
+            </a:r>
+            <a:endParaRPr lang="en-US" sz="1200" dirty="0"/>
+          </a:p>
+        </p:txBody>
+      </p:sp>
+    </p:spTree>
+  </p:cSld>
+  <p:clrMapOvr>
+    <a:masterClrMapping/>
+  </p:clrMapOvr>
+</p:sld>
+</file>
+
+<file path=ppt/slides/slide18.xml><?xml version="1.0" encoding="utf-8"?>
+<p:sld xmlns:a="http://schemas.openxmlformats.org/drawingml/2006/main" xmlns:r="http://schemas.openxmlformats.org/officeDocument/2006/relationships" xmlns:p="http://schemas.openxmlformats.org/presentationml/2006/main">
+  <p:cSld name="Slide 18">
+    <p:bg>
+      <p:bgPr>
+        <a:solidFill>
+          <a:srgbClr val="FFFFFF"/>
+        </a:solidFill>
+      </p:bgPr>
+    </p:bg>
+    <p:spTree>
+      <p:nvGrpSpPr>
+        <p:cNvPr id="1" name=""/>
+        <p:cNvGrpSpPr/>
+        <p:nvPr/>
+      </p:nvGrpSpPr>
+      <p:grpSpPr>
+        <a:xfrm>
+          <a:off x="0" y="0"/>
+          <a:ext cx="0" cy="0"/>
+          <a:chOff x="0" y="0"/>
+          <a:chExt cx="0" cy="0"/>
+        </a:xfrm>
+      </p:grpSpPr>
+      <p:sp>
+        <p:nvSpPr>
+          <p:cNvPr id="2" name="Text 0"/>
+          <p:cNvSpPr/>
+          <p:nvPr/>
+        </p:nvSpPr>
+        <p:spPr>
+          <a:xfrm>
+            <a:off x="0" y="0"/>
+            <a:ext cx="9144000" cy="101501"/>
+          </a:xfrm>
+          <a:prstGeom prst="rect">
+            <a:avLst/>
+          </a:prstGeom>
+          <a:solidFill>
+            <a:srgbClr val="277884"/>
+          </a:solidFill>
+          <a:ln/>
+        </p:spPr>
+        <p:txBody>
+          <a:bodyPr wrap="square" rtlCol="0" anchor="ctr"/>
+          <a:lstStyle/>
+          <a:p>
+            <a:pPr indent="0" marL="0">
+              <a:buNone/>
+            </a:pPr>
+            <a:endParaRPr lang="en-US" dirty="0"/>
+          </a:p>
+        </p:txBody>
+      </p:sp>
+      <p:sp>
+        <p:nvSpPr>
+          <p:cNvPr id="3" name="Text 1"/>
+          <p:cNvSpPr/>
+          <p:nvPr/>
+        </p:nvSpPr>
+        <p:spPr>
+          <a:xfrm>
+            <a:off x="406301" y="457051"/>
+            <a:ext cx="8498026" cy="274290"/>
+          </a:xfrm>
+          <a:prstGeom prst="rect">
+            <a:avLst/>
+          </a:prstGeom>
+          <a:noFill/>
+          <a:ln/>
+        </p:spPr>
+        <p:txBody>
+          <a:bodyPr wrap="square" lIns="0" tIns="0" rIns="0" bIns="0" rtlCol="0" anchor="t"/>
+          <a:lstStyle/>
+          <a:p>
+            <a:pPr algn="l" indent="0" marL="0">
+              <a:lnSpc>
+                <a:spcPts val="2160"/>
+              </a:lnSpc>
+              <a:spcBef>
+                <a:spcPts val="600"/>
+              </a:spcBef>
+              <a:spcAft>
+                <a:spcPts val="800"/>
+              </a:spcAft>
+              <a:buNone/>
+            </a:pPr>
+            <a:r>
+              <a:rPr lang="en-US" sz="1800" b="1" dirty="0">
+                <a:solidFill>
+                  <a:srgbClr val="FE4447"/>
+                </a:solidFill>
+                <a:latin typeface="Georgia" pitchFamily="34" charset="0"/>
+                <a:ea typeface="Georgia" pitchFamily="34" charset="-122"/>
+                <a:cs typeface="Georgia" pitchFamily="34" charset="-120"/>
+              </a:rPr>
+              <a:t>Citation(s) used in this lesson</a:t>
+            </a:r>
+            <a:endParaRPr lang="en-US" sz="1800" dirty="0"/>
+          </a:p>
+        </p:txBody>
+      </p:sp>
+      <p:sp>
+        <p:nvSpPr>
+          <p:cNvPr id="4" name="Text 2"/>
+          <p:cNvSpPr/>
+          <p:nvPr/>
+        </p:nvSpPr>
+        <p:spPr>
+          <a:xfrm>
+            <a:off x="634901" y="883593"/>
+            <a:ext cx="8102798" cy="731341"/>
+          </a:xfrm>
+          <a:prstGeom prst="rect">
+            <a:avLst/>
+          </a:prstGeom>
+          <a:noFill/>
+          <a:ln/>
+        </p:spPr>
+        <p:txBody>
+          <a:bodyPr wrap="square" lIns="0" tIns="0" rIns="0" bIns="0" rtlCol="0" anchor="t"/>
+          <a:lstStyle/>
+          <a:p>
+            <a:pPr algn="l" marL="342900" indent="-342900">
+              <a:lnSpc>
+                <a:spcPts val="1620"/>
+              </a:lnSpc>
+              <a:spcAft>
+                <a:spcPts val="300"/>
+              </a:spcAft>
+              <a:buSzPct val="100000"/>
+              <a:buChar char="•"/>
+            </a:pPr>
+            <a:r>
+              <a:rPr lang="en-US" sz="1200" dirty="0">
+                <a:solidFill>
+                  <a:srgbClr val="1C2833"/>
+                </a:solidFill>
+                <a:latin typeface="Arial" pitchFamily="34" charset="0"/>
+                <a:ea typeface="Arial" pitchFamily="34" charset="-122"/>
+                <a:cs typeface="Arial" pitchFamily="34" charset="-120"/>
+              </a:rPr>
+              <a:t>No new RAG citations (this is a modern-physiology lesson).</a:t>
+            </a:r>
+            <a:endParaRPr lang="en-US" sz="1200" dirty="0"/>
+          </a:p>
+          <a:p>
+            <a:pPr algn="l" marL="342900" indent="-342900">
+              <a:lnSpc>
+                <a:spcPts val="1620"/>
+              </a:lnSpc>
+              <a:spcAft>
+                <a:spcPts val="300"/>
+              </a:spcAft>
+              <a:buSzPct val="100000"/>
+              <a:buChar char="•"/>
+            </a:pPr>
+            <a:r>
+              <a:rPr lang="en-US" sz="1200" dirty="0">
+                <a:solidFill>
+                  <a:srgbClr val="1C2833"/>
+                </a:solidFill>
+                <a:latin typeface="Arial" pitchFamily="34" charset="0"/>
+                <a:ea typeface="Arial" pitchFamily="34" charset="-122"/>
+                <a:cs typeface="Arial" pitchFamily="34" charset="-120"/>
+              </a:rPr>
+              <a:t>Modern reference: any introductory text on autonomic nervous system; for teacher, Stephen Porges' polyvagal theory (advanced).</a:t>
             </a:r>
             <a:endParaRPr lang="en-US" sz="1200" dirty="0"/>
           </a:p>
@@ -3355,7 +5461,7 @@
                 <a:ea typeface="Georgia" pitchFamily="34" charset="-122"/>
                 <a:cs typeface="Georgia" pitchFamily="34" charset="-120"/>
               </a:rPr>
-              <a:t>Materials</a:t>
+              <a:t>Learning objective</a:t>
             </a:r>
             <a:endParaRPr lang="en-US" sz="1800" dirty="0"/>
           </a:p>
@@ -3370,7 +5476,7 @@
         <p:spPr>
           <a:xfrm>
             <a:off x="406301" y="870942"/>
-            <a:ext cx="8498026" cy="426541"/>
+            <a:ext cx="8498026" cy="639812"/>
           </a:xfrm>
           <a:prstGeom prst="rect">
             <a:avLst/>
@@ -3403,7 +5509,7 @@
                 <a:ea typeface="Arial" pitchFamily="34" charset="-122"/>
                 <a:cs typeface="Arial" pitchFamily="34" charset="-120"/>
               </a:rPr>
-              <a:t>– Whiteboard. – Optional: a simple diagram of the autonomic nervous system (sympathetic vs. parasympathetic). – Worksheet: concept check at end.</a:t>
+              <a:t>By the end of this lesson, students will explain at Middle-band level why slow breathing and forward folds shift the body toward "rest-and-digest" (parasympathetic) function, and why backbends and inversions can shift it toward "fight-or-flight" (sympathetic) activation.</a:t>
             </a:r>
             <a:endParaRPr lang="en-US" sz="1200" dirty="0"/>
           </a:p>
@@ -3561,7 +5667,7 @@
                 <a:ea typeface="Georgia" pitchFamily="34" charset="-122"/>
                 <a:cs typeface="Georgia" pitchFamily="34" charset="-120"/>
               </a:rPr>
-              <a:t>Vocabulary introduced today</a:t>
+              <a:t>Materials</a:t>
             </a:r>
             <a:endParaRPr lang="en-US" sz="1800" dirty="0"/>
           </a:p>
@@ -3576,7 +5682,7 @@
         <p:spPr>
           <a:xfrm>
             <a:off x="634901" y="883593"/>
-            <a:ext cx="8102798" cy="1424583"/>
+            <a:ext cx="8102798" cy="769441"/>
           </a:xfrm>
           <a:prstGeom prst="rect">
             <a:avLst/>
@@ -3599,26 +5705,6 @@
               <a:buChar char="•"/>
             </a:pPr>
             <a:r>
-              <a:rPr lang="en-US" sz="1200" b="1" dirty="0">
-                <a:solidFill>
-                  <a:srgbClr val="1C2833"/>
-                </a:solidFill>
-                <a:latin typeface="Arial" pitchFamily="34" charset="0"/>
-                <a:ea typeface="Arial" pitchFamily="34" charset="-122"/>
-                <a:cs typeface="Arial" pitchFamily="34" charset="-120"/>
-              </a:rPr>
-              <a:t>Autonomic nervous system (ANS)</a:t>
-            </a:r>
-            <a:pPr algn="l" indent="0" marL="0">
-              <a:lnSpc>
-                <a:spcPts val="1620"/>
-              </a:lnSpc>
-              <a:spcAft>
-                <a:spcPts val="300"/>
-              </a:spcAft>
-              <a:buNone/>
-            </a:pPr>
-            <a:r>
               <a:rPr lang="en-US" sz="1200" dirty="0">
                 <a:solidFill>
                   <a:srgbClr val="1C2833"/>
@@ -3627,7 +5713,7 @@
                 <a:ea typeface="Arial" pitchFamily="34" charset="-122"/>
                 <a:cs typeface="Arial" pitchFamily="34" charset="-120"/>
               </a:rPr>
-              <a:t> — the part of the nervous system that runs "automatically" (heartbeat, digestion, breathing).</a:t>
+              <a:t>Whiteboard.</a:t>
             </a:r>
             <a:endParaRPr lang="en-US" sz="1200" dirty="0"/>
           </a:p>
@@ -3643,26 +5729,6 @@
               <a:buChar char="•"/>
             </a:pPr>
             <a:r>
-              <a:rPr lang="en-US" sz="1200" b="1" dirty="0">
-                <a:solidFill>
-                  <a:srgbClr val="1C2833"/>
-                </a:solidFill>
-                <a:latin typeface="Arial" pitchFamily="34" charset="0"/>
-                <a:ea typeface="Arial" pitchFamily="34" charset="-122"/>
-                <a:cs typeface="Arial" pitchFamily="34" charset="-120"/>
-              </a:rPr>
-              <a:t>Sympathetic</a:t>
-            </a:r>
-            <a:pPr algn="l" indent="0" marL="0">
-              <a:lnSpc>
-                <a:spcPts val="1620"/>
-              </a:lnSpc>
-              <a:spcAft>
-                <a:spcPts val="300"/>
-              </a:spcAft>
-              <a:buNone/>
-            </a:pPr>
-            <a:r>
               <a:rPr lang="en-US" sz="1200" dirty="0">
                 <a:solidFill>
                   <a:srgbClr val="1C2833"/>
@@ -3671,7 +5737,7 @@
                 <a:ea typeface="Arial" pitchFamily="34" charset="-122"/>
                 <a:cs typeface="Arial" pitchFamily="34" charset="-120"/>
               </a:rPr>
-              <a:t> — "fight or flight" branch; raises heart rate, releases adrenaline.</a:t>
+              <a:t>Optional: a simple diagram of the autonomic nervous system (sympathetic vs. parasympathetic).</a:t>
             </a:r>
             <a:endParaRPr lang="en-US" sz="1200" dirty="0"/>
           </a:p>
@@ -3687,26 +5753,6 @@
               <a:buChar char="•"/>
             </a:pPr>
             <a:r>
-              <a:rPr lang="en-US" sz="1200" b="1" dirty="0">
-                <a:solidFill>
-                  <a:srgbClr val="1C2833"/>
-                </a:solidFill>
-                <a:latin typeface="Arial" pitchFamily="34" charset="0"/>
-                <a:ea typeface="Arial" pitchFamily="34" charset="-122"/>
-                <a:cs typeface="Arial" pitchFamily="34" charset="-120"/>
-              </a:rPr>
-              <a:t>Parasympathetic</a:t>
-            </a:r>
-            <a:pPr algn="l" indent="0" marL="0">
-              <a:lnSpc>
-                <a:spcPts val="1620"/>
-              </a:lnSpc>
-              <a:spcAft>
-                <a:spcPts val="300"/>
-              </a:spcAft>
-              <a:buNone/>
-            </a:pPr>
-            <a:r>
               <a:rPr lang="en-US" sz="1200" dirty="0">
                 <a:solidFill>
                   <a:srgbClr val="1C2833"/>
@@ -3715,51 +5761,7 @@
                 <a:ea typeface="Arial" pitchFamily="34" charset="-122"/>
                 <a:cs typeface="Arial" pitchFamily="34" charset="-120"/>
               </a:rPr>
-              <a:t> — "rest and digest" branch; lowers heart rate, supports digestion.</a:t>
-            </a:r>
-            <a:endParaRPr lang="en-US" sz="1200" dirty="0"/>
-          </a:p>
-          <a:p>
-            <a:pPr algn="l" marL="342900" indent="-342900">
-              <a:lnSpc>
-                <a:spcPts val="1620"/>
-              </a:lnSpc>
-              <a:spcAft>
-                <a:spcPts val="300"/>
-              </a:spcAft>
-              <a:buSzPct val="100000"/>
-              <a:buChar char="•"/>
-            </a:pPr>
-            <a:r>
-              <a:rPr lang="en-US" sz="1200" b="1" dirty="0">
-                <a:solidFill>
-                  <a:srgbClr val="1C2833"/>
-                </a:solidFill>
-                <a:latin typeface="Arial" pitchFamily="34" charset="0"/>
-                <a:ea typeface="Arial" pitchFamily="34" charset="-122"/>
-                <a:cs typeface="Arial" pitchFamily="34" charset="-120"/>
-              </a:rPr>
-              <a:t>Vagus nerve</a:t>
-            </a:r>
-            <a:pPr algn="l" indent="0" marL="0">
-              <a:lnSpc>
-                <a:spcPts val="1620"/>
-              </a:lnSpc>
-              <a:spcAft>
-                <a:spcPts val="300"/>
-              </a:spcAft>
-              <a:buNone/>
-            </a:pPr>
-            <a:r>
-              <a:rPr lang="en-US" sz="1200" dirty="0">
-                <a:solidFill>
-                  <a:srgbClr val="1C2833"/>
-                </a:solidFill>
-                <a:latin typeface="Arial" pitchFamily="34" charset="0"/>
-                <a:ea typeface="Arial" pitchFamily="34" charset="-122"/>
-                <a:cs typeface="Arial" pitchFamily="34" charset="-120"/>
-              </a:rPr>
-              <a:t> — the main nerve carrying parasympathetic signals; long, complex, connected to heart, lungs, and digestive organs.</a:t>
+              <a:t>Worksheet: concept check at end.</a:t>
             </a:r>
             <a:endParaRPr lang="en-US" sz="1200" dirty="0"/>
           </a:p>
@@ -3917,7 +5919,7 @@
                 <a:ea typeface="Georgia" pitchFamily="34" charset="-122"/>
                 <a:cs typeface="Georgia" pitchFamily="34" charset="-120"/>
               </a:rPr>
-              <a:t>Lesson flow</a:t>
+              <a:t>Vocabulary introduced today</a:t>
             </a:r>
             <a:endParaRPr lang="en-US" sz="1800" dirty="0"/>
           </a:p>
@@ -3926,6 +5928,204 @@
       <p:sp>
         <p:nvSpPr>
           <p:cNvPr id="4" name="Text 2"/>
+          <p:cNvSpPr/>
+          <p:nvPr/>
+        </p:nvSpPr>
+        <p:spPr>
+          <a:xfrm>
+            <a:off x="634901" y="883593"/>
+            <a:ext cx="8102798" cy="1424583"/>
+          </a:xfrm>
+          <a:prstGeom prst="rect">
+            <a:avLst/>
+          </a:prstGeom>
+          <a:noFill/>
+          <a:ln/>
+        </p:spPr>
+        <p:txBody>
+          <a:bodyPr wrap="square" lIns="0" tIns="0" rIns="0" bIns="0" rtlCol="0" anchor="t"/>
+          <a:lstStyle/>
+          <a:p>
+            <a:pPr algn="l" marL="342900" indent="-342900">
+              <a:lnSpc>
+                <a:spcPts val="1620"/>
+              </a:lnSpc>
+              <a:spcAft>
+                <a:spcPts val="300"/>
+              </a:spcAft>
+              <a:buSzPct val="100000"/>
+              <a:buChar char="•"/>
+            </a:pPr>
+            <a:r>
+              <a:rPr lang="en-US" sz="1200" b="1" dirty="0">
+                <a:solidFill>
+                  <a:srgbClr val="1C2833"/>
+                </a:solidFill>
+                <a:latin typeface="Arial" pitchFamily="34" charset="0"/>
+                <a:ea typeface="Arial" pitchFamily="34" charset="-122"/>
+                <a:cs typeface="Arial" pitchFamily="34" charset="-120"/>
+              </a:rPr>
+              <a:t>Autonomic nervous system (ANS)</a:t>
+            </a:r>
+            <a:pPr algn="l" indent="0" marL="0">
+              <a:lnSpc>
+                <a:spcPts val="1620"/>
+              </a:lnSpc>
+              <a:spcAft>
+                <a:spcPts val="300"/>
+              </a:spcAft>
+              <a:buNone/>
+            </a:pPr>
+            <a:r>
+              <a:rPr lang="en-US" sz="1200" dirty="0">
+                <a:solidFill>
+                  <a:srgbClr val="1C2833"/>
+                </a:solidFill>
+                <a:latin typeface="Arial" pitchFamily="34" charset="0"/>
+                <a:ea typeface="Arial" pitchFamily="34" charset="-122"/>
+                <a:cs typeface="Arial" pitchFamily="34" charset="-120"/>
+              </a:rPr>
+              <a:t> — the part of the nervous system that runs "automatically" (heartbeat, digestion, breathing).</a:t>
+            </a:r>
+            <a:endParaRPr lang="en-US" sz="1200" dirty="0"/>
+          </a:p>
+          <a:p>
+            <a:pPr algn="l" marL="342900" indent="-342900">
+              <a:lnSpc>
+                <a:spcPts val="1620"/>
+              </a:lnSpc>
+              <a:spcAft>
+                <a:spcPts val="300"/>
+              </a:spcAft>
+              <a:buSzPct val="100000"/>
+              <a:buChar char="•"/>
+            </a:pPr>
+            <a:r>
+              <a:rPr lang="en-US" sz="1200" b="1" dirty="0">
+                <a:solidFill>
+                  <a:srgbClr val="1C2833"/>
+                </a:solidFill>
+                <a:latin typeface="Arial" pitchFamily="34" charset="0"/>
+                <a:ea typeface="Arial" pitchFamily="34" charset="-122"/>
+                <a:cs typeface="Arial" pitchFamily="34" charset="-120"/>
+              </a:rPr>
+              <a:t>Sympathetic</a:t>
+            </a:r>
+            <a:pPr algn="l" indent="0" marL="0">
+              <a:lnSpc>
+                <a:spcPts val="1620"/>
+              </a:lnSpc>
+              <a:spcAft>
+                <a:spcPts val="300"/>
+              </a:spcAft>
+              <a:buNone/>
+            </a:pPr>
+            <a:r>
+              <a:rPr lang="en-US" sz="1200" dirty="0">
+                <a:solidFill>
+                  <a:srgbClr val="1C2833"/>
+                </a:solidFill>
+                <a:latin typeface="Arial" pitchFamily="34" charset="0"/>
+                <a:ea typeface="Arial" pitchFamily="34" charset="-122"/>
+                <a:cs typeface="Arial" pitchFamily="34" charset="-120"/>
+              </a:rPr>
+              <a:t> — "fight or flight" branch; raises heart rate, releases adrenaline.</a:t>
+            </a:r>
+            <a:endParaRPr lang="en-US" sz="1200" dirty="0"/>
+          </a:p>
+          <a:p>
+            <a:pPr algn="l" marL="342900" indent="-342900">
+              <a:lnSpc>
+                <a:spcPts val="1620"/>
+              </a:lnSpc>
+              <a:spcAft>
+                <a:spcPts val="300"/>
+              </a:spcAft>
+              <a:buSzPct val="100000"/>
+              <a:buChar char="•"/>
+            </a:pPr>
+            <a:r>
+              <a:rPr lang="en-US" sz="1200" b="1" dirty="0">
+                <a:solidFill>
+                  <a:srgbClr val="1C2833"/>
+                </a:solidFill>
+                <a:latin typeface="Arial" pitchFamily="34" charset="0"/>
+                <a:ea typeface="Arial" pitchFamily="34" charset="-122"/>
+                <a:cs typeface="Arial" pitchFamily="34" charset="-120"/>
+              </a:rPr>
+              <a:t>Parasympathetic</a:t>
+            </a:r>
+            <a:pPr algn="l" indent="0" marL="0">
+              <a:lnSpc>
+                <a:spcPts val="1620"/>
+              </a:lnSpc>
+              <a:spcAft>
+                <a:spcPts val="300"/>
+              </a:spcAft>
+              <a:buNone/>
+            </a:pPr>
+            <a:r>
+              <a:rPr lang="en-US" sz="1200" dirty="0">
+                <a:solidFill>
+                  <a:srgbClr val="1C2833"/>
+                </a:solidFill>
+                <a:latin typeface="Arial" pitchFamily="34" charset="0"/>
+                <a:ea typeface="Arial" pitchFamily="34" charset="-122"/>
+                <a:cs typeface="Arial" pitchFamily="34" charset="-120"/>
+              </a:rPr>
+              <a:t> — "rest and digest" branch; lowers heart rate, supports digestion.</a:t>
+            </a:r>
+            <a:endParaRPr lang="en-US" sz="1200" dirty="0"/>
+          </a:p>
+          <a:p>
+            <a:pPr algn="l" marL="342900" indent="-342900">
+              <a:lnSpc>
+                <a:spcPts val="1620"/>
+              </a:lnSpc>
+              <a:spcAft>
+                <a:spcPts val="300"/>
+              </a:spcAft>
+              <a:buSzPct val="100000"/>
+              <a:buChar char="•"/>
+            </a:pPr>
+            <a:r>
+              <a:rPr lang="en-US" sz="1200" b="1" dirty="0">
+                <a:solidFill>
+                  <a:srgbClr val="1C2833"/>
+                </a:solidFill>
+                <a:latin typeface="Arial" pitchFamily="34" charset="0"/>
+                <a:ea typeface="Arial" pitchFamily="34" charset="-122"/>
+                <a:cs typeface="Arial" pitchFamily="34" charset="-120"/>
+              </a:rPr>
+              <a:t>Vagus nerve</a:t>
+            </a:r>
+            <a:pPr algn="l" indent="0" marL="0">
+              <a:lnSpc>
+                <a:spcPts val="1620"/>
+              </a:lnSpc>
+              <a:spcAft>
+                <a:spcPts val="300"/>
+              </a:spcAft>
+              <a:buNone/>
+            </a:pPr>
+            <a:r>
+              <a:rPr lang="en-US" sz="1200" dirty="0">
+                <a:solidFill>
+                  <a:srgbClr val="1C2833"/>
+                </a:solidFill>
+                <a:latin typeface="Arial" pitchFamily="34" charset="0"/>
+                <a:ea typeface="Arial" pitchFamily="34" charset="-122"/>
+                <a:cs typeface="Arial" pitchFamily="34" charset="-120"/>
+              </a:rPr>
+              <a:t> — the main nerve carrying parasympathetic signals; long, complex, connected to heart, lungs, and digestive organs.</a:t>
+            </a:r>
+            <a:endParaRPr lang="en-US" sz="1200" dirty="0"/>
+          </a:p>
+        </p:txBody>
+      </p:sp>
+      <p:sp>
+        <p:nvSpPr>
+          <p:cNvPr id="5" name="Text 3"/>
           <p:cNvSpPr/>
           <p:nvPr/>
         </p:nvSpPr>
@@ -4075,7 +6275,7 @@
                 <a:ea typeface="Georgia" pitchFamily="34" charset="-122"/>
                 <a:cs typeface="Georgia" pitchFamily="34" charset="-120"/>
               </a:rPr>
-              <a:t>Settle (2 min)</a:t>
+              <a:t>Lesson flow</a:t>
             </a:r>
             <a:endParaRPr lang="en-US" sz="1800" dirty="0"/>
           </a:p>
@@ -4084,54 +6284,6 @@
       <p:sp>
         <p:nvSpPr>
           <p:cNvPr id="4" name="Text 2"/>
-          <p:cNvSpPr/>
-          <p:nvPr/>
-        </p:nvSpPr>
-        <p:spPr>
-          <a:xfrm>
-            <a:off x="406301" y="870942"/>
-            <a:ext cx="8498026" cy="213271"/>
-          </a:xfrm>
-          <a:prstGeom prst="rect">
-            <a:avLst/>
-          </a:prstGeom>
-          <a:noFill/>
-          <a:ln/>
-        </p:spPr>
-        <p:txBody>
-          <a:bodyPr wrap="square" lIns="0" tIns="0" rIns="0" bIns="0" rtlCol="0" anchor="t"/>
-          <a:lstStyle/>
-          <a:p>
-            <a:pPr algn="l" indent="0" marL="0">
-              <a:lnSpc>
-                <a:spcPts val="1680"/>
-              </a:lnSpc>
-              <a:spcBef>
-                <a:spcPts val="300"/>
-              </a:spcBef>
-              <a:spcAft>
-                <a:spcPts val="300"/>
-              </a:spcAft>
-              <a:buNone/>
-            </a:pPr>
-            <a:r>
-              <a:rPr lang="en-US" sz="1200" dirty="0">
-                <a:solidFill>
-                  <a:srgbClr val="1C2833"/>
-                </a:solidFill>
-                <a:latin typeface="Arial" pitchFamily="34" charset="0"/>
-                <a:ea typeface="Arial" pitchFamily="34" charset="-122"/>
-                <a:cs typeface="Arial" pitchFamily="34" charset="-120"/>
-              </a:rPr>
-              <a:t>– Sukhāsana. 5 breaths.</a:t>
-            </a:r>
-            <a:endParaRPr lang="en-US" sz="1200" dirty="0"/>
-          </a:p>
-        </p:txBody>
-      </p:sp>
-      <p:sp>
-        <p:nvSpPr>
-          <p:cNvPr id="5" name="Text 3"/>
           <p:cNvSpPr/>
           <p:nvPr/>
         </p:nvSpPr>
@@ -4281,7 +6433,7 @@
                 <a:ea typeface="Georgia" pitchFamily="34" charset="-122"/>
                 <a:cs typeface="Georgia" pitchFamily="34" charset="-120"/>
               </a:rPr>
-              <a:t>Practice (10 min) — Stress-recovery sequence</a:t>
+              <a:t>Settle (2 min)</a:t>
             </a:r>
             <a:endParaRPr lang="en-US" sz="1800" dirty="0"/>
           </a:p>
@@ -4295,8 +6447,8 @@
         </p:nvSpPr>
         <p:spPr>
           <a:xfrm>
-            <a:off x="406301" y="870942"/>
-            <a:ext cx="8498026" cy="213271"/>
+            <a:off x="634901" y="883593"/>
+            <a:ext cx="8102798" cy="281880"/>
           </a:xfrm>
           <a:prstGeom prst="rect">
             <a:avLst/>
@@ -4308,54 +6460,6 @@
           <a:bodyPr wrap="square" lIns="0" tIns="0" rIns="0" bIns="0" rtlCol="0" anchor="t"/>
           <a:lstStyle/>
           <a:p>
-            <a:pPr algn="l" indent="0" marL="0">
-              <a:lnSpc>
-                <a:spcPts val="1680"/>
-              </a:lnSpc>
-              <a:spcBef>
-                <a:spcPts val="300"/>
-              </a:spcBef>
-              <a:spcAft>
-                <a:spcPts val="300"/>
-              </a:spcAft>
-              <a:buNone/>
-            </a:pPr>
-            <a:r>
-              <a:rPr lang="en-US" sz="1200" dirty="0">
-                <a:solidFill>
-                  <a:srgbClr val="1C2833"/>
-                </a:solidFill>
-                <a:latin typeface="Arial" pitchFamily="34" charset="0"/>
-                <a:ea typeface="Arial" pitchFamily="34" charset="-122"/>
-                <a:cs typeface="Arial" pitchFamily="34" charset="-120"/>
-              </a:rPr>
-              <a:t>Demonstrate a short calming sequence the class can do before a stressful event:</a:t>
-            </a:r>
-            <a:endParaRPr lang="en-US" sz="1200" dirty="0"/>
-          </a:p>
-        </p:txBody>
-      </p:sp>
-      <p:sp>
-        <p:nvSpPr>
-          <p:cNvPr id="5" name="Text 3"/>
-          <p:cNvSpPr/>
-          <p:nvPr/>
-        </p:nvSpPr>
-        <p:spPr>
-          <a:xfrm>
-            <a:off x="634901" y="1173063"/>
-            <a:ext cx="8102798" cy="1257002"/>
-          </a:xfrm>
-          <a:prstGeom prst="rect">
-            <a:avLst/>
-          </a:prstGeom>
-          <a:noFill/>
-          <a:ln/>
-        </p:spPr>
-        <p:txBody>
-          <a:bodyPr wrap="square" lIns="0" tIns="0" rIns="0" bIns="0" rtlCol="0" anchor="t"/>
-          <a:lstStyle/>
-          <a:p>
             <a:pPr algn="l" marL="342900" indent="-342900">
               <a:lnSpc>
                 <a:spcPts val="1620"/>
@@ -4367,26 +6471,6 @@
               <a:buChar char="•"/>
             </a:pPr>
             <a:r>
-              <a:rPr lang="en-US" sz="1200" b="1" dirty="0">
-                <a:solidFill>
-                  <a:srgbClr val="1C2833"/>
-                </a:solidFill>
-                <a:latin typeface="Arial" pitchFamily="34" charset="0"/>
-                <a:ea typeface="Arial" pitchFamily="34" charset="-122"/>
-                <a:cs typeface="Arial" pitchFamily="34" charset="-120"/>
-              </a:rPr>
-              <a:t>Tāḍāsana</a:t>
-            </a:r>
-            <a:pPr algn="l" indent="0" marL="0">
-              <a:lnSpc>
-                <a:spcPts val="1620"/>
-              </a:lnSpc>
-              <a:spcAft>
-                <a:spcPts val="300"/>
-              </a:spcAft>
-              <a:buNone/>
-            </a:pPr>
-            <a:r>
               <a:rPr lang="en-US" sz="1200" dirty="0">
                 <a:solidFill>
                   <a:srgbClr val="1C2833"/>
@@ -4395,262 +6479,15 @@
                 <a:ea typeface="Arial" pitchFamily="34" charset="-122"/>
                 <a:cs typeface="Arial" pitchFamily="34" charset="-120"/>
               </a:rPr>
-              <a:t>, 30 sec.</a:t>
+              <a:t>Sukhāsana. 5 breaths.</a:t>
             </a:r>
             <a:endParaRPr lang="en-US" sz="1200" dirty="0"/>
           </a:p>
-          <a:p>
-            <a:pPr algn="l" marL="342900" indent="-342900">
-              <a:lnSpc>
-                <a:spcPts val="1620"/>
-              </a:lnSpc>
-              <a:spcAft>
-                <a:spcPts val="300"/>
-              </a:spcAft>
-              <a:buSzPct val="100000"/>
-              <a:buChar char="•"/>
-            </a:pPr>
-            <a:r>
-              <a:rPr lang="en-US" sz="1200" b="1" dirty="0">
-                <a:solidFill>
-                  <a:srgbClr val="1C2833"/>
-                </a:solidFill>
-                <a:latin typeface="Arial" pitchFamily="34" charset="0"/>
-                <a:ea typeface="Arial" pitchFamily="34" charset="-122"/>
-                <a:cs typeface="Arial" pitchFamily="34" charset="-120"/>
-              </a:rPr>
-              <a:t>Uttānāsana</a:t>
-            </a:r>
-            <a:pPr algn="l" indent="0" marL="0">
-              <a:lnSpc>
-                <a:spcPts val="1620"/>
-              </a:lnSpc>
-              <a:spcAft>
-                <a:spcPts val="300"/>
-              </a:spcAft>
-              <a:buNone/>
-            </a:pPr>
-            <a:r>
-              <a:rPr lang="en-US" sz="1200" dirty="0">
-                <a:solidFill>
-                  <a:srgbClr val="1C2833"/>
-                </a:solidFill>
-                <a:latin typeface="Arial" pitchFamily="34" charset="0"/>
-                <a:ea typeface="Arial" pitchFamily="34" charset="-122"/>
-                <a:cs typeface="Arial" pitchFamily="34" charset="-120"/>
-              </a:rPr>
-              <a:t> (standing forward fold), 30 sec — let the head hang.</a:t>
-            </a:r>
-            <a:endParaRPr lang="en-US" sz="1200" dirty="0"/>
-          </a:p>
-          <a:p>
-            <a:pPr algn="l" marL="342900" indent="-342900">
-              <a:lnSpc>
-                <a:spcPts val="1620"/>
-              </a:lnSpc>
-              <a:spcAft>
-                <a:spcPts val="300"/>
-              </a:spcAft>
-              <a:buSzPct val="100000"/>
-              <a:buChar char="•"/>
-            </a:pPr>
-            <a:r>
-              <a:rPr lang="en-US" sz="1200" b="1" dirty="0">
-                <a:solidFill>
-                  <a:srgbClr val="1C2833"/>
-                </a:solidFill>
-                <a:latin typeface="Arial" pitchFamily="34" charset="0"/>
-                <a:ea typeface="Arial" pitchFamily="34" charset="-122"/>
-                <a:cs typeface="Arial" pitchFamily="34" charset="-120"/>
-              </a:rPr>
-              <a:t>Balāsana</a:t>
-            </a:r>
-            <a:pPr algn="l" indent="0" marL="0">
-              <a:lnSpc>
-                <a:spcPts val="1620"/>
-              </a:lnSpc>
-              <a:spcAft>
-                <a:spcPts val="300"/>
-              </a:spcAft>
-              <a:buNone/>
-            </a:pPr>
-            <a:r>
-              <a:rPr lang="en-US" sz="1200" dirty="0">
-                <a:solidFill>
-                  <a:srgbClr val="1C2833"/>
-                </a:solidFill>
-                <a:latin typeface="Arial" pitchFamily="34" charset="0"/>
-                <a:ea typeface="Arial" pitchFamily="34" charset="-122"/>
-                <a:cs typeface="Arial" pitchFamily="34" charset="-120"/>
-              </a:rPr>
-              <a:t> (child's pose), 60 sec.</a:t>
-            </a:r>
-            <a:endParaRPr lang="en-US" sz="1200" dirty="0"/>
-          </a:p>
-          <a:p>
-            <a:pPr algn="l" marL="342900" indent="-342900">
-              <a:lnSpc>
-                <a:spcPts val="1620"/>
-              </a:lnSpc>
-              <a:spcAft>
-                <a:spcPts val="300"/>
-              </a:spcAft>
-              <a:buSzPct val="100000"/>
-              <a:buChar char="•"/>
-            </a:pPr>
-            <a:r>
-              <a:rPr lang="en-US" sz="1200" b="1" dirty="0">
-                <a:solidFill>
-                  <a:srgbClr val="1C2833"/>
-                </a:solidFill>
-                <a:latin typeface="Arial" pitchFamily="34" charset="0"/>
-                <a:ea typeface="Arial" pitchFamily="34" charset="-122"/>
-                <a:cs typeface="Arial" pitchFamily="34" charset="-120"/>
-              </a:rPr>
-              <a:t>Sukhāsana</a:t>
-            </a:r>
-            <a:pPr algn="l" indent="0" marL="0">
-              <a:lnSpc>
-                <a:spcPts val="1620"/>
-              </a:lnSpc>
-              <a:spcAft>
-                <a:spcPts val="300"/>
-              </a:spcAft>
-              <a:buNone/>
-            </a:pPr>
-            <a:r>
-              <a:rPr lang="en-US" sz="1200" dirty="0">
-                <a:solidFill>
-                  <a:srgbClr val="1C2833"/>
-                </a:solidFill>
-                <a:latin typeface="Arial" pitchFamily="34" charset="0"/>
-                <a:ea typeface="Arial" pitchFamily="34" charset="-122"/>
-                <a:cs typeface="Arial" pitchFamily="34" charset="-120"/>
-              </a:rPr>
-              <a:t>, counted breath (4 in, 4 out), 60 sec.</a:t>
-            </a:r>
-            <a:endParaRPr lang="en-US" sz="1200" dirty="0"/>
-          </a:p>
-          <a:p>
-            <a:pPr algn="l" marL="342900" indent="-342900">
-              <a:lnSpc>
-                <a:spcPts val="1620"/>
-              </a:lnSpc>
-              <a:spcAft>
-                <a:spcPts val="300"/>
-              </a:spcAft>
-              <a:buSzPct val="100000"/>
-              <a:buChar char="•"/>
-            </a:pPr>
-            <a:r>
-              <a:rPr lang="en-US" sz="1200" b="1" dirty="0">
-                <a:solidFill>
-                  <a:srgbClr val="1C2833"/>
-                </a:solidFill>
-                <a:latin typeface="Arial" pitchFamily="34" charset="0"/>
-                <a:ea typeface="Arial" pitchFamily="34" charset="-122"/>
-                <a:cs typeface="Arial" pitchFamily="34" charset="-120"/>
-              </a:rPr>
-              <a:t>Tāḍāsana</a:t>
-            </a:r>
-            <a:pPr algn="l" indent="0" marL="0">
-              <a:lnSpc>
-                <a:spcPts val="1620"/>
-              </a:lnSpc>
-              <a:spcAft>
-                <a:spcPts val="300"/>
-              </a:spcAft>
-              <a:buNone/>
-            </a:pPr>
-            <a:r>
-              <a:rPr lang="en-US" sz="1200" dirty="0">
-                <a:solidFill>
-                  <a:srgbClr val="1C2833"/>
-                </a:solidFill>
-                <a:latin typeface="Arial" pitchFamily="34" charset="0"/>
-                <a:ea typeface="Arial" pitchFamily="34" charset="-122"/>
-                <a:cs typeface="Arial" pitchFamily="34" charset="-120"/>
-              </a:rPr>
-              <a:t> to close, 30 sec.</a:t>
-            </a:r>
-            <a:endParaRPr lang="en-US" sz="1200" dirty="0"/>
-          </a:p>
-        </p:txBody>
-      </p:sp>
-      <p:sp>
-        <p:nvSpPr>
-          <p:cNvPr id="6" name="Text 4"/>
-          <p:cNvSpPr/>
-          <p:nvPr/>
-        </p:nvSpPr>
-        <p:spPr>
-          <a:xfrm>
-            <a:off x="406301" y="2518916"/>
-            <a:ext cx="8498026" cy="426541"/>
-          </a:xfrm>
-          <a:prstGeom prst="rect">
-            <a:avLst/>
-          </a:prstGeom>
-          <a:noFill/>
-          <a:ln/>
-        </p:spPr>
-        <p:txBody>
-          <a:bodyPr wrap="square" lIns="0" tIns="0" rIns="0" bIns="0" rtlCol="0" anchor="t"/>
-          <a:lstStyle/>
-          <a:p>
-            <a:pPr algn="l" indent="0" marL="0">
-              <a:lnSpc>
-                <a:spcPts val="1680"/>
-              </a:lnSpc>
-              <a:spcBef>
-                <a:spcPts val="300"/>
-              </a:spcBef>
-              <a:spcAft>
-                <a:spcPts val="300"/>
-              </a:spcAft>
-              <a:buNone/>
-            </a:pPr>
-            <a:r>
-              <a:rPr lang="en-US" sz="1200" dirty="0">
-                <a:solidFill>
-                  <a:srgbClr val="1C2833"/>
-                </a:solidFill>
-                <a:latin typeface="Arial" pitchFamily="34" charset="0"/>
-                <a:ea typeface="Arial" pitchFamily="34" charset="-122"/>
-                <a:cs typeface="Arial" pitchFamily="34" charset="-120"/>
-              </a:rPr>
-              <a:t>Total: 3.5 min. Practice once together. </a:t>
-            </a:r>
-            <a:pPr algn="l" indent="0" marL="0">
-              <a:lnSpc>
-                <a:spcPts val="1680"/>
-              </a:lnSpc>
-              <a:spcBef>
-                <a:spcPts val="300"/>
-              </a:spcBef>
-              <a:spcAft>
-                <a:spcPts val="300"/>
-              </a:spcAft>
-              <a:buNone/>
-            </a:pPr>
-            <a:r>
-              <a:rPr lang="en-US" sz="1200" i="1" dirty="0">
-                <a:solidFill>
-                  <a:srgbClr val="1C2833"/>
-                </a:solidFill>
-                <a:latin typeface="Arial" pitchFamily="34" charset="0"/>
-                <a:ea typeface="Arial" pitchFamily="34" charset="-122"/>
-                <a:cs typeface="Arial" pitchFamily="34" charset="-120"/>
-              </a:rPr>
-              <a:t>"Use this before exams. Use this when you're stressed. It works because of physiology, not magic."</a:t>
-            </a:r>
-            <a:endParaRPr lang="en-US" sz="1200" dirty="0"/>
-          </a:p>
-        </p:txBody>
-      </p:sp>
-      <p:sp>
-        <p:nvSpPr>
-          <p:cNvPr id="7" name="Text 5"/>
+        </p:txBody>
+      </p:sp>
+      <p:sp>
+        <p:nvSpPr>
+          <p:cNvPr id="5" name="Text 3"/>
           <p:cNvSpPr/>
           <p:nvPr/>
         </p:nvSpPr>
@@ -4800,7 +6637,7 @@
                 <a:ea typeface="Georgia" pitchFamily="34" charset="-122"/>
                 <a:cs typeface="Georgia" pitchFamily="34" charset="-120"/>
               </a:rPr>
-              <a:t>Concept check (10 min)</a:t>
+              <a:t>Core (15 min) — Two modes of the body</a:t>
             </a:r>
             <a:endParaRPr lang="en-US" sz="1800" dirty="0"/>
           </a:p>
@@ -4814,8 +6651,8 @@
         </p:nvSpPr>
         <p:spPr>
           <a:xfrm>
-            <a:off x="406301" y="870942"/>
-            <a:ext cx="8498026" cy="639812"/>
+            <a:off x="634901" y="883593"/>
+            <a:ext cx="8102798" cy="281880"/>
           </a:xfrm>
           <a:prstGeom prst="rect">
             <a:avLst/>
@@ -4827,8 +6664,74 @@
           <a:bodyPr wrap="square" lIns="0" tIns="0" rIns="0" bIns="0" rtlCol="0" anchor="t"/>
           <a:lstStyle/>
           <a:p>
+            <a:pPr algn="l" marL="342900" indent="-342900">
+              <a:lnSpc>
+                <a:spcPts val="1620"/>
+              </a:lnSpc>
+              <a:spcAft>
+                <a:spcPts val="300"/>
+              </a:spcAft>
+              <a:buSzPct val="100000"/>
+              <a:buChar char="•"/>
+            </a:pPr>
+            <a:r>
+              <a:rPr lang="en-US" sz="1200" b="1" dirty="0">
+                <a:solidFill>
+                  <a:srgbClr val="1C2833"/>
+                </a:solidFill>
+                <a:latin typeface="Arial" pitchFamily="34" charset="0"/>
+                <a:ea typeface="Arial" pitchFamily="34" charset="-122"/>
+                <a:cs typeface="Arial" pitchFamily="34" charset="-120"/>
+              </a:rPr>
+              <a:t>Two modes:</a:t>
+            </a:r>
             <a:pPr algn="l" indent="0" marL="0">
               <a:lnSpc>
+                <a:spcPts val="1620"/>
+              </a:lnSpc>
+              <a:spcAft>
+                <a:spcPts val="300"/>
+              </a:spcAft>
+              <a:buNone/>
+            </a:pPr>
+            <a:r>
+              <a:rPr lang="en-US" sz="1200" dirty="0">
+                <a:solidFill>
+                  <a:srgbClr val="1C2833"/>
+                </a:solidFill>
+                <a:latin typeface="Arial" pitchFamily="34" charset="0"/>
+                <a:ea typeface="Arial" pitchFamily="34" charset="-122"/>
+                <a:cs typeface="Arial" pitchFamily="34" charset="-120"/>
+              </a:rPr>
+              <a:t> write on board, large.</a:t>
+            </a:r>
+            <a:endParaRPr lang="en-US" sz="1200" dirty="0"/>
+          </a:p>
+        </p:txBody>
+      </p:sp>
+      <p:sp>
+        <p:nvSpPr>
+          <p:cNvPr id="5" name="Text 3"/>
+          <p:cNvSpPr/>
+          <p:nvPr/>
+        </p:nvSpPr>
+        <p:spPr>
+          <a:xfrm>
+            <a:off x="406301" y="1254323"/>
+            <a:ext cx="8498026" cy="213271"/>
+          </a:xfrm>
+          <a:prstGeom prst="rect">
+            <a:avLst/>
+          </a:prstGeom>
+          <a:noFill/>
+          <a:ln/>
+        </p:spPr>
+        <p:txBody>
+          <a:bodyPr wrap="square" lIns="0" tIns="0" rIns="0" bIns="0" rtlCol="0" anchor="t"/>
+          <a:lstStyle/>
+          <a:p>
+            <a:pPr algn="l" indent="0" marL="0">
+              <a:lnSpc>
                 <a:spcPts val="1680"/>
               </a:lnSpc>
               <a:spcBef>
@@ -4840,29 +6743,6 @@
               <a:buNone/>
             </a:pPr>
             <a:r>
-              <a:rPr lang="en-US" sz="1200" dirty="0">
-                <a:solidFill>
-                  <a:srgbClr val="1C2833"/>
-                </a:solidFill>
-                <a:latin typeface="Arial" pitchFamily="34" charset="0"/>
-                <a:ea typeface="Arial" pitchFamily="34" charset="-122"/>
-                <a:cs typeface="Arial" pitchFamily="34" charset="-120"/>
-              </a:rPr>
-              <a:t>– 5-question worksheet: 1. Which branch of the ANS is "fight or flight"? 2. Which is "rest and digest"? 3. Which nerve carries most of the parasympathetic signals? 4. Does a slow exhale stimulate sympathetic or parasympathetic? 5. Why does </a:t>
-            </a:r>
-            <a:pPr algn="l" indent="0" marL="0">
-              <a:lnSpc>
-                <a:spcPts val="1680"/>
-              </a:lnSpc>
-              <a:spcBef>
-                <a:spcPts val="300"/>
-              </a:spcBef>
-              <a:spcAft>
-                <a:spcPts val="300"/>
-              </a:spcAft>
-              <a:buNone/>
-            </a:pPr>
-            <a:r>
               <a:rPr lang="en-US" sz="1200" i="1" dirty="0">
                 <a:solidFill>
                   <a:srgbClr val="1C2833"/>
@@ -4871,30 +6751,7 @@
                 <a:ea typeface="Arial" pitchFamily="34" charset="-122"/>
                 <a:cs typeface="Arial" pitchFamily="34" charset="-120"/>
               </a:rPr>
-              <a:t>balāsana</a:t>
-            </a:r>
-            <a:pPr algn="l" indent="0" marL="0">
-              <a:lnSpc>
-                <a:spcPts val="1680"/>
-              </a:lnSpc>
-              <a:spcBef>
-                <a:spcPts val="300"/>
-              </a:spcBef>
-              <a:spcAft>
-                <a:spcPts val="300"/>
-              </a:spcAft>
-              <a:buNone/>
-            </a:pPr>
-            <a:r>
-              <a:rPr lang="en-US" sz="1200" dirty="0">
-                <a:solidFill>
-                  <a:srgbClr val="1C2833"/>
-                </a:solidFill>
-                <a:latin typeface="Arial" pitchFamily="34" charset="0"/>
-                <a:ea typeface="Arial" pitchFamily="34" charset="-122"/>
-                <a:cs typeface="Arial" pitchFamily="34" charset="-120"/>
-              </a:rPr>
-              <a:t> feel calming?</a:t>
+              <a:t>Each row: "Fight or flight" (sympathetic) · "Rest and digest" (parasympathetic).</a:t>
             </a:r>
             <a:endParaRPr lang="en-US" sz="1200" dirty="0"/>
           </a:p>
@@ -4902,7 +6759,7 @@
       </p:sp>
       <p:sp>
         <p:nvSpPr>
-          <p:cNvPr id="5" name="Text 3"/>
+          <p:cNvPr id="6" name="Text 4"/>
           <p:cNvSpPr/>
           <p:nvPr/>
         </p:nvSpPr>
@@ -5052,7 +6909,7 @@
                 <a:ea typeface="Georgia" pitchFamily="34" charset="-122"/>
                 <a:cs typeface="Georgia" pitchFamily="34" charset="-120"/>
               </a:rPr>
-              <a:t>Wrap-up (3 min)</a:t>
+              <a:t>Core (15 min) — Two modes of the body (cont.)</a:t>
             </a:r>
             <a:endParaRPr lang="en-US" sz="1800" dirty="0"/>
           </a:p>
@@ -5066,8 +6923,8 @@
         </p:nvSpPr>
         <p:spPr>
           <a:xfrm>
-            <a:off x="406301" y="870942"/>
-            <a:ext cx="8498026" cy="426541"/>
+            <a:off x="634901" y="883593"/>
+            <a:ext cx="8102798" cy="1744563"/>
           </a:xfrm>
           <a:prstGeom prst="rect">
             <a:avLst/>
@@ -5079,13 +6936,31 @@
           <a:bodyPr wrap="square" lIns="0" tIns="0" rIns="0" bIns="0" rtlCol="0" anchor="t"/>
           <a:lstStyle/>
           <a:p>
+            <a:pPr algn="l" marL="342900" indent="-342900">
+              <a:lnSpc>
+                <a:spcPts val="1620"/>
+              </a:lnSpc>
+              <a:spcAft>
+                <a:spcPts val="300"/>
+              </a:spcAft>
+              <a:buSzPct val="100000"/>
+              <a:buChar char="•"/>
+            </a:pPr>
+            <a:r>
+              <a:rPr lang="en-US" sz="1200" b="1" dirty="0">
+                <a:solidFill>
+                  <a:srgbClr val="1C2833"/>
+                </a:solidFill>
+                <a:latin typeface="Arial" pitchFamily="34" charset="0"/>
+                <a:ea typeface="Arial" pitchFamily="34" charset="-122"/>
+                <a:cs typeface="Arial" pitchFamily="34" charset="-120"/>
+              </a:rPr>
+              <a:t>Heart rate up</a:t>
+            </a:r>
             <a:pPr algn="l" indent="0" marL="0">
               <a:lnSpc>
-                <a:spcPts val="1680"/>
-              </a:lnSpc>
-              <a:spcBef>
-                <a:spcPts val="300"/>
-              </a:spcBef>
+                <a:spcPts val="1620"/>
+              </a:lnSpc>
               <a:spcAft>
                 <a:spcPts val="300"/>
               </a:spcAft>
@@ -5100,30 +6975,271 @@
                 <a:ea typeface="Arial" pitchFamily="34" charset="-122"/>
                 <a:cs typeface="Arial" pitchFamily="34" charset="-120"/>
               </a:rPr>
-              <a:t>– 2 student shares on the worksheet answers. – Preview Day 8: </a:t>
+              <a:t> — Heart rate down</a:t>
+            </a:r>
+            <a:endParaRPr lang="en-US" sz="1200" dirty="0"/>
+          </a:p>
+          <a:p>
+            <a:pPr algn="l" marL="342900" indent="-342900">
+              <a:lnSpc>
+                <a:spcPts val="1620"/>
+              </a:lnSpc>
+              <a:spcAft>
+                <a:spcPts val="300"/>
+              </a:spcAft>
+              <a:buSzPct val="100000"/>
+              <a:buChar char="•"/>
+            </a:pPr>
+            <a:r>
+              <a:rPr lang="en-US" sz="1200" b="1" dirty="0">
+                <a:solidFill>
+                  <a:srgbClr val="1C2833"/>
+                </a:solidFill>
+                <a:latin typeface="Arial" pitchFamily="34" charset="0"/>
+                <a:ea typeface="Arial" pitchFamily="34" charset="-122"/>
+                <a:cs typeface="Arial" pitchFamily="34" charset="-120"/>
+              </a:rPr>
+              <a:t>Breath fast and shallow</a:t>
             </a:r>
             <a:pPr algn="l" indent="0" marL="0">
               <a:lnSpc>
-                <a:spcPts val="1680"/>
-              </a:lnSpc>
-              <a:spcBef>
-                <a:spcPts val="300"/>
-              </a:spcBef>
-              <a:spcAft>
-                <a:spcPts val="300"/>
-              </a:spcAft>
-              <a:buNone/>
-            </a:pPr>
-            <a:r>
-              <a:rPr lang="en-US" sz="1200" i="1" dirty="0">
-                <a:solidFill>
-                  <a:srgbClr val="1C2833"/>
-                </a:solidFill>
-                <a:latin typeface="Arial" pitchFamily="34" charset="0"/>
-                <a:ea typeface="Arial" pitchFamily="34" charset="-122"/>
-                <a:cs typeface="Arial" pitchFamily="34" charset="-120"/>
-              </a:rPr>
-              <a:t>"Project work begins. You'll design your own 5-minute routine for your chosen audience."</a:t>
+                <a:spcPts val="1620"/>
+              </a:lnSpc>
+              <a:spcAft>
+                <a:spcPts val="300"/>
+              </a:spcAft>
+              <a:buNone/>
+            </a:pPr>
+            <a:r>
+              <a:rPr lang="en-US" sz="1200" dirty="0">
+                <a:solidFill>
+                  <a:srgbClr val="1C2833"/>
+                </a:solidFill>
+                <a:latin typeface="Arial" pitchFamily="34" charset="0"/>
+                <a:ea typeface="Arial" pitchFamily="34" charset="-122"/>
+                <a:cs typeface="Arial" pitchFamily="34" charset="-120"/>
+              </a:rPr>
+              <a:t> — Breath slow and deep</a:t>
+            </a:r>
+            <a:endParaRPr lang="en-US" sz="1200" dirty="0"/>
+          </a:p>
+          <a:p>
+            <a:pPr algn="l" marL="342900" indent="-342900">
+              <a:lnSpc>
+                <a:spcPts val="1620"/>
+              </a:lnSpc>
+              <a:spcAft>
+                <a:spcPts val="300"/>
+              </a:spcAft>
+              <a:buSzPct val="100000"/>
+              <a:buChar char="•"/>
+            </a:pPr>
+            <a:r>
+              <a:rPr lang="en-US" sz="1200" b="1" dirty="0">
+                <a:solidFill>
+                  <a:srgbClr val="1C2833"/>
+                </a:solidFill>
+                <a:latin typeface="Arial" pitchFamily="34" charset="0"/>
+                <a:ea typeface="Arial" pitchFamily="34" charset="-122"/>
+                <a:cs typeface="Arial" pitchFamily="34" charset="-120"/>
+              </a:rPr>
+              <a:t>Pupils dilate</a:t>
+            </a:r>
+            <a:pPr algn="l" indent="0" marL="0">
+              <a:lnSpc>
+                <a:spcPts val="1620"/>
+              </a:lnSpc>
+              <a:spcAft>
+                <a:spcPts val="300"/>
+              </a:spcAft>
+              <a:buNone/>
+            </a:pPr>
+            <a:r>
+              <a:rPr lang="en-US" sz="1200" dirty="0">
+                <a:solidFill>
+                  <a:srgbClr val="1C2833"/>
+                </a:solidFill>
+                <a:latin typeface="Arial" pitchFamily="34" charset="0"/>
+                <a:ea typeface="Arial" pitchFamily="34" charset="-122"/>
+                <a:cs typeface="Arial" pitchFamily="34" charset="-120"/>
+              </a:rPr>
+              <a:t> — Pupils contract</a:t>
+            </a:r>
+            <a:endParaRPr lang="en-US" sz="1200" dirty="0"/>
+          </a:p>
+          <a:p>
+            <a:pPr algn="l" marL="342900" indent="-342900">
+              <a:lnSpc>
+                <a:spcPts val="1620"/>
+              </a:lnSpc>
+              <a:spcAft>
+                <a:spcPts val="300"/>
+              </a:spcAft>
+              <a:buSzPct val="100000"/>
+              <a:buChar char="•"/>
+            </a:pPr>
+            <a:r>
+              <a:rPr lang="en-US" sz="1200" b="1" dirty="0">
+                <a:solidFill>
+                  <a:srgbClr val="1C2833"/>
+                </a:solidFill>
+                <a:latin typeface="Arial" pitchFamily="34" charset="0"/>
+                <a:ea typeface="Arial" pitchFamily="34" charset="-122"/>
+                <a:cs typeface="Arial" pitchFamily="34" charset="-120"/>
+              </a:rPr>
+              <a:t>Digestion stops</a:t>
+            </a:r>
+            <a:pPr algn="l" indent="0" marL="0">
+              <a:lnSpc>
+                <a:spcPts val="1620"/>
+              </a:lnSpc>
+              <a:spcAft>
+                <a:spcPts val="300"/>
+              </a:spcAft>
+              <a:buNone/>
+            </a:pPr>
+            <a:r>
+              <a:rPr lang="en-US" sz="1200" dirty="0">
+                <a:solidFill>
+                  <a:srgbClr val="1C2833"/>
+                </a:solidFill>
+                <a:latin typeface="Arial" pitchFamily="34" charset="0"/>
+                <a:ea typeface="Arial" pitchFamily="34" charset="-122"/>
+                <a:cs typeface="Arial" pitchFamily="34" charset="-120"/>
+              </a:rPr>
+              <a:t> — Digestion runs</a:t>
+            </a:r>
+            <a:endParaRPr lang="en-US" sz="1200" dirty="0"/>
+          </a:p>
+          <a:p>
+            <a:pPr algn="l" marL="342900" indent="-342900">
+              <a:lnSpc>
+                <a:spcPts val="1620"/>
+              </a:lnSpc>
+              <a:spcAft>
+                <a:spcPts val="300"/>
+              </a:spcAft>
+              <a:buSzPct val="100000"/>
+              <a:buChar char="•"/>
+            </a:pPr>
+            <a:r>
+              <a:rPr lang="en-US" sz="1200" b="1" dirty="0">
+                <a:solidFill>
+                  <a:srgbClr val="1C2833"/>
+                </a:solidFill>
+                <a:latin typeface="Arial" pitchFamily="34" charset="0"/>
+                <a:ea typeface="Arial" pitchFamily="34" charset="-122"/>
+                <a:cs typeface="Arial" pitchFamily="34" charset="-120"/>
+              </a:rPr>
+              <a:t>Muscles tense</a:t>
+            </a:r>
+            <a:pPr algn="l" indent="0" marL="0">
+              <a:lnSpc>
+                <a:spcPts val="1620"/>
+              </a:lnSpc>
+              <a:spcAft>
+                <a:spcPts val="300"/>
+              </a:spcAft>
+              <a:buNone/>
+            </a:pPr>
+            <a:r>
+              <a:rPr lang="en-US" sz="1200" dirty="0">
+                <a:solidFill>
+                  <a:srgbClr val="1C2833"/>
+                </a:solidFill>
+                <a:latin typeface="Arial" pitchFamily="34" charset="0"/>
+                <a:ea typeface="Arial" pitchFamily="34" charset="-122"/>
+                <a:cs typeface="Arial" pitchFamily="34" charset="-120"/>
+              </a:rPr>
+              <a:t> — Muscles soften</a:t>
+            </a:r>
+            <a:endParaRPr lang="en-US" sz="1200" dirty="0"/>
+          </a:p>
+          <a:p>
+            <a:pPr algn="l" marL="342900" indent="-342900">
+              <a:lnSpc>
+                <a:spcPts val="1620"/>
+              </a:lnSpc>
+              <a:spcAft>
+                <a:spcPts val="300"/>
+              </a:spcAft>
+              <a:buSzPct val="100000"/>
+              <a:buChar char="•"/>
+            </a:pPr>
+            <a:r>
+              <a:rPr lang="en-US" sz="1200" b="1" dirty="0">
+                <a:solidFill>
+                  <a:srgbClr val="1C2833"/>
+                </a:solidFill>
+                <a:latin typeface="Arial" pitchFamily="34" charset="0"/>
+                <a:ea typeface="Arial" pitchFamily="34" charset="-122"/>
+                <a:cs typeface="Arial" pitchFamily="34" charset="-120"/>
+              </a:rPr>
+              <a:t>Useful when</a:t>
+            </a:r>
+            <a:pPr algn="l" indent="0" marL="0">
+              <a:lnSpc>
+                <a:spcPts val="1620"/>
+              </a:lnSpc>
+              <a:spcAft>
+                <a:spcPts val="300"/>
+              </a:spcAft>
+              <a:buNone/>
+            </a:pPr>
+            <a:r>
+              <a:rPr lang="en-US" sz="1200" dirty="0">
+                <a:solidFill>
+                  <a:srgbClr val="1C2833"/>
+                </a:solidFill>
+                <a:latin typeface="Arial" pitchFamily="34" charset="0"/>
+                <a:ea typeface="Arial" pitchFamily="34" charset="-122"/>
+                <a:cs typeface="Arial" pitchFamily="34" charset="-120"/>
+              </a:rPr>
+              <a:t> — Useful when</a:t>
+            </a:r>
+            <a:endParaRPr lang="en-US" sz="1200" dirty="0"/>
+          </a:p>
+          <a:p>
+            <a:pPr algn="l" marL="342900" indent="-342900">
+              <a:lnSpc>
+                <a:spcPts val="1620"/>
+              </a:lnSpc>
+              <a:spcAft>
+                <a:spcPts val="300"/>
+              </a:spcAft>
+              <a:buSzPct val="100000"/>
+              <a:buChar char="•"/>
+            </a:pPr>
+            <a:r>
+              <a:rPr lang="en-US" sz="1200" b="1" dirty="0">
+                <a:solidFill>
+                  <a:srgbClr val="1C2833"/>
+                </a:solidFill>
+                <a:latin typeface="Arial" pitchFamily="34" charset="0"/>
+                <a:ea typeface="Arial" pitchFamily="34" charset="-122"/>
+                <a:cs typeface="Arial" pitchFamily="34" charset="-120"/>
+              </a:rPr>
+              <a:t>running from danger; exam panic</a:t>
+            </a:r>
+            <a:pPr algn="l" indent="0" marL="0">
+              <a:lnSpc>
+                <a:spcPts val="1620"/>
+              </a:lnSpc>
+              <a:spcAft>
+                <a:spcPts val="300"/>
+              </a:spcAft>
+              <a:buNone/>
+            </a:pPr>
+            <a:r>
+              <a:rPr lang="en-US" sz="1200" dirty="0">
+                <a:solidFill>
+                  <a:srgbClr val="1C2833"/>
+                </a:solidFill>
+                <a:latin typeface="Arial" pitchFamily="34" charset="0"/>
+                <a:ea typeface="Arial" pitchFamily="34" charset="-122"/>
+                <a:cs typeface="Arial" pitchFamily="34" charset="-120"/>
+              </a:rPr>
+              <a:t> — resting; eating; sleeping; healing</a:t>
             </a:r>
             <a:endParaRPr lang="en-US" sz="1200" dirty="0"/>
           </a:p>
@@ -5281,7 +7397,7 @@
                 <a:ea typeface="Georgia" pitchFamily="34" charset="-122"/>
                 <a:cs typeface="Georgia" pitchFamily="34" charset="-120"/>
               </a:rPr>
-              <a:t>Student-facing content</a:t>
+              <a:t>Core (15 min) — Two modes of the body (cont.)</a:t>
             </a:r>
             <a:endParaRPr lang="en-US" sz="1800" dirty="0"/>
           </a:p>
@@ -5295,61 +7411,74 @@
         </p:nvSpPr>
         <p:spPr>
           <a:xfrm>
-            <a:off x="406301" y="883593"/>
-            <a:ext cx="8331398" cy="3188494"/>
-          </a:xfrm>
-          <a:prstGeom prst="rect">
-            <a:avLst/>
-          </a:prstGeom>
-          <a:solidFill>
-            <a:srgbClr val="F4F8F9"/>
-          </a:solidFill>
+            <a:off x="634901" y="883593"/>
+            <a:ext cx="8102798" cy="487561"/>
+          </a:xfrm>
+          <a:prstGeom prst="rect">
+            <a:avLst/>
+          </a:prstGeom>
+          <a:noFill/>
           <a:ln/>
         </p:spPr>
         <p:txBody>
-          <a:bodyPr wrap="square" rtlCol="0" anchor="ctr"/>
-          <a:lstStyle/>
-          <a:p>
-            <a:pPr indent="0" marL="0">
-              <a:buNone/>
-            </a:pPr>
-            <a:endParaRPr lang="en-US" dirty="0"/>
-          </a:p>
-        </p:txBody>
-      </p:sp>
-      <p:sp>
-        <p:nvSpPr>
-          <p:cNvPr id="5" name="Shape 3"/>
+          <a:bodyPr wrap="square" lIns="0" tIns="0" rIns="0" bIns="0" rtlCol="0" anchor="t"/>
+          <a:lstStyle/>
+          <a:p>
+            <a:pPr algn="l" marL="342900" indent="-342900">
+              <a:lnSpc>
+                <a:spcPts val="1620"/>
+              </a:lnSpc>
+              <a:spcAft>
+                <a:spcPts val="300"/>
+              </a:spcAft>
+              <a:buSzPct val="100000"/>
+              <a:buChar char="•"/>
+            </a:pPr>
+            <a:r>
+              <a:rPr lang="en-US" sz="1200" b="1" dirty="0">
+                <a:solidFill>
+                  <a:srgbClr val="1C2833"/>
+                </a:solidFill>
+                <a:latin typeface="Arial" pitchFamily="34" charset="0"/>
+                <a:ea typeface="Arial" pitchFamily="34" charset="-122"/>
+                <a:cs typeface="Arial" pitchFamily="34" charset="-120"/>
+              </a:rPr>
+              <a:t>The breath is the lever.</a:t>
+            </a:r>
+            <a:pPr algn="l" indent="0" marL="0">
+              <a:lnSpc>
+                <a:spcPts val="1620"/>
+              </a:lnSpc>
+              <a:spcAft>
+                <a:spcPts val="300"/>
+              </a:spcAft>
+              <a:buNone/>
+            </a:pPr>
+            <a:r>
+              <a:rPr lang="en-US" sz="1200" dirty="0">
+                <a:solidFill>
+                  <a:srgbClr val="1C2833"/>
+                </a:solidFill>
+                <a:latin typeface="Arial" pitchFamily="34" charset="0"/>
+                <a:ea typeface="Arial" pitchFamily="34" charset="-122"/>
+                <a:cs typeface="Arial" pitchFamily="34" charset="-120"/>
+              </a:rPr>
+              <a:t> Most ANS functions you can't consciously control — but you CAN control your breath. And breath signals back to the ANS.</a:t>
+            </a:r>
+            <a:endParaRPr lang="en-US" sz="1200" dirty="0"/>
+          </a:p>
+        </p:txBody>
+      </p:sp>
+      <p:sp>
+        <p:nvSpPr>
+          <p:cNvPr id="5" name="Text 3"/>
           <p:cNvSpPr/>
           <p:nvPr/>
         </p:nvSpPr>
         <p:spPr>
           <a:xfrm>
-            <a:off x="434876" y="883593"/>
-            <a:ext cx="0" cy="3188494"/>
-          </a:xfrm>
-          <a:prstGeom prst="line">
-            <a:avLst/>
-          </a:prstGeom>
-          <a:noFill/>
-          <a:ln w="57150">
-            <a:solidFill>
-              <a:srgbClr val="FE4447"/>
-            </a:solidFill>
-            <a:prstDash val="solid"/>
-          </a:ln>
-        </p:spPr>
-      </p:sp>
-      <p:sp>
-        <p:nvSpPr>
-          <p:cNvPr id="6" name="Text 4"/>
-          <p:cNvSpPr/>
-          <p:nvPr/>
-        </p:nvSpPr>
-        <p:spPr>
-          <a:xfrm>
-            <a:off x="692051" y="1074093"/>
-            <a:ext cx="7973389" cy="230981"/>
+            <a:off x="634901" y="1472654"/>
+            <a:ext cx="8102798" cy="487561"/>
           </a:xfrm>
           <a:prstGeom prst="rect">
             <a:avLst/>
@@ -5361,441 +7490,54 @@
           <a:bodyPr wrap="square" lIns="0" tIns="0" rIns="0" bIns="0" rtlCol="0" anchor="t"/>
           <a:lstStyle/>
           <a:p>
+            <a:pPr algn="l" marL="342900" indent="-342900">
+              <a:lnSpc>
+                <a:spcPts val="1620"/>
+              </a:lnSpc>
+              <a:spcAft>
+                <a:spcPts val="300"/>
+              </a:spcAft>
+              <a:buSzPct val="100000"/>
+              <a:buChar char="•"/>
+            </a:pPr>
+            <a:r>
+              <a:rPr lang="en-US" sz="1200" b="1" dirty="0">
+                <a:solidFill>
+                  <a:srgbClr val="1C2833"/>
+                </a:solidFill>
+                <a:latin typeface="Arial" pitchFamily="34" charset="0"/>
+                <a:ea typeface="Arial" pitchFamily="34" charset="-122"/>
+                <a:cs typeface="Arial" pitchFamily="34" charset="-120"/>
+              </a:rPr>
+              <a:t>What slow exhalation does:</a:t>
+            </a:r>
             <a:pPr algn="l" indent="0" marL="0">
               <a:lnSpc>
-                <a:spcPts val="1820"/>
-              </a:lnSpc>
-              <a:spcBef>
-                <a:spcPts val="300"/>
-              </a:spcBef>
-              <a:spcAft>
-                <a:spcPts val="300"/>
-              </a:spcAft>
-              <a:buNone/>
-            </a:pPr>
-            <a:r>
-              <a:rPr lang="en-US" sz="1300" b="1" i="1" dirty="0">
-                <a:solidFill>
-                  <a:srgbClr val="1C2833"/>
-                </a:solidFill>
-                <a:latin typeface="Georgia" pitchFamily="34" charset="0"/>
-                <a:ea typeface="Georgia" pitchFamily="34" charset="-122"/>
-                <a:cs typeface="Georgia" pitchFamily="34" charset="-120"/>
-              </a:rPr>
-              <a:t>Why Yoga "Works" — The Physiology</a:t>
-            </a:r>
-            <a:endParaRPr lang="en-US" sz="1300" dirty="0"/>
-          </a:p>
-        </p:txBody>
-      </p:sp>
-      <p:sp>
-        <p:nvSpPr>
-          <p:cNvPr id="7" name="Text 5"/>
-          <p:cNvSpPr/>
-          <p:nvPr/>
-        </p:nvSpPr>
-        <p:spPr>
-          <a:xfrm>
-            <a:off x="692051" y="1343174"/>
-            <a:ext cx="7973389" cy="230981"/>
-          </a:xfrm>
-          <a:prstGeom prst="rect">
-            <a:avLst/>
-          </a:prstGeom>
-          <a:noFill/>
-          <a:ln/>
-        </p:spPr>
-        <p:txBody>
-          <a:bodyPr wrap="square" lIns="0" tIns="0" rIns="0" bIns="0" rtlCol="0" anchor="t"/>
-          <a:lstStyle/>
-          <a:p>
-            <a:pPr algn="l" indent="0" marL="0">
-              <a:lnSpc>
-                <a:spcPts val="1820"/>
-              </a:lnSpc>
-              <a:spcBef>
-                <a:spcPts val="300"/>
-              </a:spcBef>
-              <a:spcAft>
-                <a:spcPts val="300"/>
-              </a:spcAft>
-              <a:buNone/>
-            </a:pPr>
-            <a:r>
-              <a:rPr lang="en-US" sz="1300" i="1" dirty="0">
-                <a:solidFill>
-                  <a:srgbClr val="1C2833"/>
-                </a:solidFill>
-                <a:latin typeface="Georgia" pitchFamily="34" charset="0"/>
-                <a:ea typeface="Georgia" pitchFamily="34" charset="-122"/>
-                <a:cs typeface="Georgia" pitchFamily="34" charset="-120"/>
-              </a:rPr>
-              <a:t>Your body has two modes:</a:t>
-            </a:r>
-            <a:endParaRPr lang="en-US" sz="1300" dirty="0"/>
-          </a:p>
-        </p:txBody>
-      </p:sp>
-      <p:sp>
-        <p:nvSpPr>
-          <p:cNvPr id="8" name="Text 6"/>
-          <p:cNvSpPr/>
-          <p:nvPr/>
-        </p:nvSpPr>
-        <p:spPr>
-          <a:xfrm>
-            <a:off x="692051" y="1612255"/>
-            <a:ext cx="7973389" cy="461963"/>
-          </a:xfrm>
-          <a:prstGeom prst="rect">
-            <a:avLst/>
-          </a:prstGeom>
-          <a:noFill/>
-          <a:ln/>
-        </p:spPr>
-        <p:txBody>
-          <a:bodyPr wrap="square" lIns="0" tIns="0" rIns="0" bIns="0" rtlCol="0" anchor="t"/>
-          <a:lstStyle/>
-          <a:p>
-            <a:pPr algn="l" indent="0" marL="0">
-              <a:lnSpc>
-                <a:spcPts val="1820"/>
-              </a:lnSpc>
-              <a:spcBef>
-                <a:spcPts val="300"/>
-              </a:spcBef>
-              <a:spcAft>
-                <a:spcPts val="300"/>
-              </a:spcAft>
-              <a:buNone/>
-            </a:pPr>
-            <a:r>
-              <a:rPr lang="en-US" sz="1300" i="1" dirty="0">
-                <a:solidFill>
-                  <a:srgbClr val="1C2833"/>
-                </a:solidFill>
-                <a:latin typeface="Georgia" pitchFamily="34" charset="0"/>
-                <a:ea typeface="Georgia" pitchFamily="34" charset="-122"/>
-                <a:cs typeface="Georgia" pitchFamily="34" charset="-120"/>
-              </a:rPr>
-              <a:t>| Sympathetic | Parasympathetic | |-------------|------------------| | "Fight or flight" | "Rest and digest" | | Fast heart, fast breath | Slow heart, slow breath |</a:t>
-            </a:r>
-            <a:endParaRPr lang="en-US" sz="1300" dirty="0"/>
-          </a:p>
-        </p:txBody>
-      </p:sp>
-      <p:sp>
-        <p:nvSpPr>
-          <p:cNvPr id="9" name="Text 7"/>
-          <p:cNvSpPr/>
-          <p:nvPr/>
-        </p:nvSpPr>
-        <p:spPr>
-          <a:xfrm>
-            <a:off x="692051" y="2112318"/>
-            <a:ext cx="7973389" cy="230981"/>
-          </a:xfrm>
-          <a:prstGeom prst="rect">
-            <a:avLst/>
-          </a:prstGeom>
-          <a:noFill/>
-          <a:ln/>
-        </p:spPr>
-        <p:txBody>
-          <a:bodyPr wrap="square" lIns="0" tIns="0" rIns="0" bIns="0" rtlCol="0" anchor="t"/>
-          <a:lstStyle/>
-          <a:p>
-            <a:pPr algn="l" indent="0" marL="0">
-              <a:lnSpc>
-                <a:spcPts val="1820"/>
-              </a:lnSpc>
-              <a:spcBef>
-                <a:spcPts val="300"/>
-              </a:spcBef>
-              <a:spcAft>
-                <a:spcPts val="300"/>
-              </a:spcAft>
-              <a:buNone/>
-            </a:pPr>
-            <a:r>
-              <a:rPr lang="en-US" sz="1300" dirty="0">
-                <a:solidFill>
-                  <a:srgbClr val="1C2833"/>
-                </a:solidFill>
-                <a:latin typeface="Georgia" pitchFamily="34" charset="0"/>
-                <a:ea typeface="Georgia" pitchFamily="34" charset="-122"/>
-                <a:cs typeface="Georgia" pitchFamily="34" charset="-120"/>
-              </a:rPr>
-              <a:t>The </a:t>
-            </a:r>
-            <a:pPr algn="l" indent="0" marL="0">
-              <a:lnSpc>
-                <a:spcPts val="1820"/>
-              </a:lnSpc>
-              <a:spcBef>
-                <a:spcPts val="300"/>
-              </a:spcBef>
-              <a:spcAft>
-                <a:spcPts val="300"/>
-              </a:spcAft>
-              <a:buNone/>
-            </a:pPr>
-            <a:r>
-              <a:rPr lang="en-US" sz="1300" b="1" i="1" dirty="0">
-                <a:solidFill>
-                  <a:srgbClr val="1C2833"/>
-                </a:solidFill>
-                <a:latin typeface="Georgia" pitchFamily="34" charset="0"/>
-                <a:ea typeface="Georgia" pitchFamily="34" charset="-122"/>
-                <a:cs typeface="Georgia" pitchFamily="34" charset="-120"/>
-              </a:rPr>
-              <a:t>vagus nerve</a:t>
-            </a:r>
-            <a:pPr algn="l" indent="0" marL="0">
-              <a:lnSpc>
-                <a:spcPts val="1820"/>
-              </a:lnSpc>
-              <a:spcBef>
-                <a:spcPts val="300"/>
-              </a:spcBef>
-              <a:spcAft>
-                <a:spcPts val="300"/>
-              </a:spcAft>
-              <a:buNone/>
-            </a:pPr>
-            <a:r>
-              <a:rPr lang="en-US" sz="1300" dirty="0">
-                <a:solidFill>
-                  <a:srgbClr val="1C2833"/>
-                </a:solidFill>
-                <a:latin typeface="Georgia" pitchFamily="34" charset="0"/>
-                <a:ea typeface="Georgia" pitchFamily="34" charset="-122"/>
-                <a:cs typeface="Georgia" pitchFamily="34" charset="-120"/>
-              </a:rPr>
-              <a:t> carries the "rest" signals. </a:t>
-            </a:r>
-            <a:pPr algn="l" indent="0" marL="0">
-              <a:lnSpc>
-                <a:spcPts val="1820"/>
-              </a:lnSpc>
-              <a:spcBef>
-                <a:spcPts val="300"/>
-              </a:spcBef>
-              <a:spcAft>
-                <a:spcPts val="300"/>
-              </a:spcAft>
-              <a:buNone/>
-            </a:pPr>
-            <a:r>
-              <a:rPr lang="en-US" sz="1300" b="1" i="1" dirty="0">
-                <a:solidFill>
-                  <a:srgbClr val="1C2833"/>
-                </a:solidFill>
-                <a:latin typeface="Georgia" pitchFamily="34" charset="0"/>
-                <a:ea typeface="Georgia" pitchFamily="34" charset="-122"/>
-                <a:cs typeface="Georgia" pitchFamily="34" charset="-120"/>
-              </a:rPr>
-              <a:t>Slow exhalation stimulates the vagus nerve.</a:t>
-            </a:r>
-            <a:endParaRPr lang="en-US" sz="1300" dirty="0"/>
-          </a:p>
-        </p:txBody>
-      </p:sp>
-      <p:sp>
-        <p:nvSpPr>
-          <p:cNvPr id="10" name="Text 8"/>
-          <p:cNvSpPr/>
-          <p:nvPr/>
-        </p:nvSpPr>
-        <p:spPr>
-          <a:xfrm>
-            <a:off x="692051" y="2381399"/>
-            <a:ext cx="7973389" cy="461963"/>
-          </a:xfrm>
-          <a:prstGeom prst="rect">
-            <a:avLst/>
-          </a:prstGeom>
-          <a:noFill/>
-          <a:ln/>
-        </p:spPr>
-        <p:txBody>
-          <a:bodyPr wrap="square" lIns="0" tIns="0" rIns="0" bIns="0" rtlCol="0" anchor="t"/>
-          <a:lstStyle/>
-          <a:p>
-            <a:pPr algn="l" indent="0" marL="0">
-              <a:lnSpc>
-                <a:spcPts val="1820"/>
-              </a:lnSpc>
-              <a:spcBef>
-                <a:spcPts val="300"/>
-              </a:spcBef>
-              <a:spcAft>
-                <a:spcPts val="300"/>
-              </a:spcAft>
-              <a:buNone/>
-            </a:pPr>
-            <a:r>
-              <a:rPr lang="en-US" sz="1300" i="1" dirty="0">
-                <a:solidFill>
-                  <a:srgbClr val="1C2833"/>
-                </a:solidFill>
-                <a:latin typeface="Georgia" pitchFamily="34" charset="0"/>
-                <a:ea typeface="Georgia" pitchFamily="34" charset="-122"/>
-                <a:cs typeface="Georgia" pitchFamily="34" charset="-120"/>
-              </a:rPr>
-              <a:t>So when you breathe slowly OR fold forward OR rest in child's pose — your body shifts toward calm. Not magic; physiology.</a:t>
-            </a:r>
-            <a:endParaRPr lang="en-US" sz="1300" dirty="0"/>
-          </a:p>
-        </p:txBody>
-      </p:sp>
-      <p:sp>
-        <p:nvSpPr>
-          <p:cNvPr id="11" name="Text 9"/>
-          <p:cNvSpPr/>
-          <p:nvPr/>
-        </p:nvSpPr>
-        <p:spPr>
-          <a:xfrm>
-            <a:off x="692051" y="2881461"/>
-            <a:ext cx="7973389" cy="230981"/>
-          </a:xfrm>
-          <a:prstGeom prst="rect">
-            <a:avLst/>
-          </a:prstGeom>
-          <a:noFill/>
-          <a:ln/>
-        </p:spPr>
-        <p:txBody>
-          <a:bodyPr wrap="square" lIns="0" tIns="0" rIns="0" bIns="0" rtlCol="0" anchor="t"/>
-          <a:lstStyle/>
-          <a:p>
-            <a:pPr algn="l" indent="0" marL="0">
-              <a:lnSpc>
-                <a:spcPts val="1820"/>
-              </a:lnSpc>
-              <a:spcBef>
-                <a:spcPts val="300"/>
-              </a:spcBef>
-              <a:spcAft>
-                <a:spcPts val="300"/>
-              </a:spcAft>
-              <a:buNone/>
-            </a:pPr>
-            <a:r>
-              <a:rPr lang="en-US" sz="1300" b="1" i="1" dirty="0">
-                <a:solidFill>
-                  <a:srgbClr val="1C2833"/>
-                </a:solidFill>
-                <a:latin typeface="Georgia" pitchFamily="34" charset="0"/>
-                <a:ea typeface="Georgia" pitchFamily="34" charset="-122"/>
-                <a:cs typeface="Georgia" pitchFamily="34" charset="-120"/>
-              </a:rPr>
-              <a:t>A short stress-recovery sequence:</a:t>
-            </a:r>
-            <a:endParaRPr lang="en-US" sz="1300" dirty="0"/>
-          </a:p>
-        </p:txBody>
-      </p:sp>
-      <p:sp>
-        <p:nvSpPr>
-          <p:cNvPr id="12" name="Text 10"/>
-          <p:cNvSpPr/>
-          <p:nvPr/>
-        </p:nvSpPr>
-        <p:spPr>
-          <a:xfrm>
-            <a:off x="692051" y="3150543"/>
-            <a:ext cx="7973389" cy="461963"/>
-          </a:xfrm>
-          <a:prstGeom prst="rect">
-            <a:avLst/>
-          </a:prstGeom>
-          <a:noFill/>
-          <a:ln/>
-        </p:spPr>
-        <p:txBody>
-          <a:bodyPr wrap="square" lIns="0" tIns="0" rIns="0" bIns="0" rtlCol="0" anchor="t"/>
-          <a:lstStyle/>
-          <a:p>
-            <a:pPr algn="l" indent="0" marL="0">
-              <a:lnSpc>
-                <a:spcPts val="1820"/>
-              </a:lnSpc>
-              <a:spcBef>
-                <a:spcPts val="300"/>
-              </a:spcBef>
-              <a:spcAft>
-                <a:spcPts val="300"/>
-              </a:spcAft>
-              <a:buNone/>
-            </a:pPr>
-            <a:r>
-              <a:rPr lang="en-US" sz="1300" i="1" dirty="0">
-                <a:solidFill>
-                  <a:srgbClr val="1C2833"/>
-                </a:solidFill>
-                <a:latin typeface="Georgia" pitchFamily="34" charset="0"/>
-                <a:ea typeface="Georgia" pitchFamily="34" charset="-122"/>
-                <a:cs typeface="Georgia" pitchFamily="34" charset="-120"/>
-              </a:rPr>
-              <a:t>1. Tāḍāsana — 30 sec 2. Uttānāsana — 30 sec 3. Balāsana — 60 sec 4. Sukhāsana with counted breath (4-in, 4-out) — 60 sec 5. Tāḍāsana — 30 sec</a:t>
-            </a:r>
-            <a:endParaRPr lang="en-US" sz="1300" dirty="0"/>
-          </a:p>
-        </p:txBody>
-      </p:sp>
-      <p:sp>
-        <p:nvSpPr>
-          <p:cNvPr id="13" name="Text 11"/>
-          <p:cNvSpPr/>
-          <p:nvPr/>
-        </p:nvSpPr>
-        <p:spPr>
-          <a:xfrm>
-            <a:off x="692051" y="3650605"/>
-            <a:ext cx="7973389" cy="230981"/>
-          </a:xfrm>
-          <a:prstGeom prst="rect">
-            <a:avLst/>
-          </a:prstGeom>
-          <a:noFill/>
-          <a:ln/>
-        </p:spPr>
-        <p:txBody>
-          <a:bodyPr wrap="square" lIns="0" tIns="0" rIns="0" bIns="0" rtlCol="0" anchor="t"/>
-          <a:lstStyle/>
-          <a:p>
-            <a:pPr algn="l" indent="0" marL="0">
-              <a:lnSpc>
-                <a:spcPts val="1820"/>
-              </a:lnSpc>
-              <a:spcBef>
-                <a:spcPts val="300"/>
-              </a:spcBef>
-              <a:spcAft>
-                <a:spcPts val="300"/>
-              </a:spcAft>
-              <a:buNone/>
-            </a:pPr>
-            <a:r>
-              <a:rPr lang="en-US" sz="1300" i="1" dirty="0">
-                <a:solidFill>
-                  <a:srgbClr val="1C2833"/>
-                </a:solidFill>
-                <a:latin typeface="Georgia" pitchFamily="34" charset="0"/>
-                <a:ea typeface="Georgia" pitchFamily="34" charset="-122"/>
-                <a:cs typeface="Georgia" pitchFamily="34" charset="-120"/>
-              </a:rPr>
-              <a:t>Use this before exams.</a:t>
-            </a:r>
-            <a:endParaRPr lang="en-US" sz="1300" dirty="0"/>
-          </a:p>
-        </p:txBody>
-      </p:sp>
-      <p:sp>
-        <p:nvSpPr>
-          <p:cNvPr id="14" name="Text 12"/>
+                <a:spcPts val="1620"/>
+              </a:lnSpc>
+              <a:spcAft>
+                <a:spcPts val="300"/>
+              </a:spcAft>
+              <a:buNone/>
+            </a:pPr>
+            <a:r>
+              <a:rPr lang="en-US" sz="1200" dirty="0">
+                <a:solidFill>
+                  <a:srgbClr val="1C2833"/>
+                </a:solidFill>
+                <a:latin typeface="Arial" pitchFamily="34" charset="0"/>
+                <a:ea typeface="Arial" pitchFamily="34" charset="-122"/>
+                <a:cs typeface="Arial" pitchFamily="34" charset="-120"/>
+              </a:rPr>
+              <a:t> stimulates the vagus nerve. Vagus nerve signals "rest and digest" to the body. So slow exhales = parasympathetic activation = calm body.</a:t>
+            </a:r>
+            <a:endParaRPr lang="en-US" sz="1200" dirty="0"/>
+          </a:p>
+        </p:txBody>
+      </p:sp>
+      <p:sp>
+        <p:nvSpPr>
+          <p:cNvPr id="6" name="Text 4"/>
           <p:cNvSpPr/>
           <p:nvPr/>
         </p:nvSpPr>
